--- a/docs/slides/pptx/08-ntl-what-darkness-tells-us-en.pptx
+++ b/docs/slides/pptx/08-ntl-what-darkness-tells-us-en.pptx
@@ -24,6 +24,9 @@
     <p:sldId id="272" r:id="rId23"/>
     <p:sldId id="273" r:id="rId24"/>
     <p:sldId id="274" r:id="rId25"/>
+    <p:sldId id="275" r:id="rId26"/>
+    <p:sldId id="276" r:id="rId27"/>
+    <p:sldId id="277" r:id="rId28"/>
   </p:sldIdLst>
   <p:sldSz cx="12191695" cy="6858000" type="screen4x3"/>
   <p:notesSz cx="6858000" cy="9144000"/>
@@ -3317,17 +3320,18 @@
         <p:spPr>
           <a:xfrm>
             <a:off x="0" y="0"/>
-            <a:ext cx="12191695" cy="60000"/>
+            <a:ext cx="12191695" cy="6858000"/>
           </a:xfrm>
           <a:prstGeom prst="rect">
             <a:avLst/>
           </a:prstGeom>
           <a:solidFill>
-            <a:srgbClr val="F2A900"/>
+            <a:srgbClr val="0B2545"/>
           </a:solidFill>
           <a:ln>
             <a:noFill/>
           </a:ln>
+          <a:effectLst/>
         </p:spPr>
         <p:style>
           <a:lnRef idx="1">
@@ -3360,7 +3364,7 @@
         <p:spPr>
           <a:xfrm>
             <a:off x="731520" y="502920"/>
-            <a:ext cx="10728655" cy="914400"/>
+            <a:ext cx="10728655" cy="320040"/>
           </a:xfrm>
           <a:prstGeom prst="rect">
             <a:avLst/>
@@ -3375,13 +3379,13 @@
           <a:p>
             <a:pPr algn="l"/>
             <a:r>
-              <a:rPr sz="2800" b="1">
-                <a:solidFill>
-                  <a:srgbClr val="0B2545"/>
-                </a:solidFill>
-                <a:latin typeface="Segoe UI"/>
-              </a:rPr>
-              <a:t>Three numbers, three different questions</a:t>
+              <a:rPr sz="1100" b="1">
+                <a:solidFill>
+                  <a:srgbClr val="F2A900"/>
+                </a:solidFill>
+                <a:latin typeface="Segoe UI"/>
+              </a:rPr>
+              <a:t>PART 2</a:t>
             </a:r>
           </a:p>
         </p:txBody>
@@ -3394,8 +3398,8 @@
         </p:nvSpPr>
         <p:spPr>
           <a:xfrm>
-            <a:off x="731520" y="1371600"/>
-            <a:ext cx="10728655" cy="548640"/>
+            <a:off x="731520" y="914400"/>
+            <a:ext cx="10728655" cy="914400"/>
           </a:xfrm>
           <a:prstGeom prst="rect">
             <a:avLst/>
@@ -3410,13 +3414,13 @@
           <a:p>
             <a:pPr algn="l"/>
             <a:r>
-              <a:rPr sz="1400" b="0">
-                <a:solidFill>
-                  <a:srgbClr val="33403A"/>
-                </a:solidFill>
-                <a:latin typeface="Segoe UI"/>
-              </a:rPr>
-              <a:t>Total radiance over an area.</a:t>
+              <a:rPr sz="2800" b="1">
+                <a:solidFill>
+                  <a:srgbClr val="FFFFFF"/>
+                </a:solidFill>
+                <a:latin typeface="Segoe UI"/>
+              </a:rPr>
+              <a:t>From radiance to an indicator</a:t>
             </a:r>
           </a:p>
         </p:txBody>
@@ -3429,7 +3433,7 @@
         </p:nvSpPr>
         <p:spPr>
           <a:xfrm>
-            <a:off x="731520" y="1874520"/>
+            <a:off x="731520" y="1783080"/>
             <a:ext cx="10728655" cy="548640"/>
           </a:xfrm>
           <a:prstGeom prst="rect">
@@ -3447,13 +3451,11 @@
             <a:r>
               <a:rPr sz="1400" b="0">
                 <a:solidFill>
-                  <a:srgbClr val="33403A"/>
-                </a:solidFill>
-                <a:latin typeface="Segoe UI"/>
-              </a:rPr>
-              <a:t>Answers:  how much lit activity is
-there?  Grows when existing places get brighter  and  when new
-places light up. Dominated by cities.</a:t>
+                  <a:srgbClr val="DBE7E0"/>
+                </a:solidFill>
+                <a:latin typeface="Segoe UI"/>
+              </a:rPr>
+              <a:t>The five steps you will run this morning and this afternoon.</a:t>
             </a:r>
           </a:p>
         </p:txBody>
@@ -3461,155 +3463,6 @@
       <p:sp>
         <p:nvSpPr>
           <p:cNvPr id="6" name="TextBox 5"/>
-          <p:cNvSpPr txBox="1"/>
-          <p:nvPr/>
-        </p:nvSpPr>
-        <p:spPr>
-          <a:xfrm>
-            <a:off x="731520" y="2377440"/>
-            <a:ext cx="10728655" cy="548640"/>
-          </a:xfrm>
-          <a:prstGeom prst="rect">
-            <a:avLst/>
-          </a:prstGeom>
-          <a:noFill/>
-        </p:spPr>
-        <p:txBody>
-          <a:bodyPr wrap="square">
-            <a:spAutoFit/>
-          </a:bodyPr>
-          <a:lstStyle/>
-          <a:p>
-            <a:pPr algn="l"/>
-            <a:r>
-              <a:rPr sz="1400" b="0">
-                <a:solidFill>
-                  <a:srgbClr val="33403A"/>
-                </a:solidFill>
-                <a:latin typeface="Segoe UI"/>
-              </a:rPr>
-              <a:t>Share of territory above a threshold.</a:t>
-            </a:r>
-          </a:p>
-        </p:txBody>
-      </p:sp>
-      <p:sp>
-        <p:nvSpPr>
-          <p:cNvPr id="7" name="Rectangle 6"/>
-          <p:cNvSpPr/>
-          <p:nvPr/>
-        </p:nvSpPr>
-        <p:spPr>
-          <a:xfrm>
-            <a:off x="731520" y="2880360"/>
-            <a:ext cx="10728655" cy="960120"/>
-          </a:xfrm>
-          <a:prstGeom prst="rect">
-            <a:avLst/>
-          </a:prstGeom>
-          <a:solidFill>
-            <a:srgbClr val="F4F8F5"/>
-          </a:solidFill>
-          <a:ln>
-            <a:solidFill>
-              <a:srgbClr val="1B7A43"/>
-            </a:solidFill>
-          </a:ln>
-          <a:effectLst/>
-        </p:spPr>
-        <p:style>
-          <a:lnRef idx="1">
-            <a:schemeClr val="accent1"/>
-          </a:lnRef>
-          <a:fillRef idx="3">
-            <a:schemeClr val="accent1"/>
-          </a:fillRef>
-          <a:effectRef idx="2">
-            <a:schemeClr val="accent1"/>
-          </a:effectRef>
-          <a:fontRef idx="minor">
-            <a:schemeClr val="lt1"/>
-          </a:fontRef>
-        </p:style>
-        <p:txBody>
-          <a:bodyPr rtlCol="0" anchor="ctr" wrap="square"/>
-          <a:lstStyle/>
-          <a:p>
-            <a:pPr algn="ctr"/>
-            <a:r>
-              <a:rPr sz="1200">
-                <a:solidFill>
-                  <a:srgbClr val="33403A"/>
-                </a:solidFill>
-                <a:latin typeface="Segoe UI"/>
-              </a:rPr>
-              <a:t>WHY ALL THREE — A country can post a rising Sum of Lights while its lit area stagnates and its
-inequality worsens — meaning the capital grew and the rest did not. One number
-hides that. Three numbers show it, and the third is the one that changes where
-you would put an investment.</a:t>
-            </a:r>
-          </a:p>
-        </p:txBody>
-      </p:sp>
-      <p:sp>
-        <p:nvSpPr>
-          <p:cNvPr id="8" name="Rectangle 7"/>
-          <p:cNvSpPr/>
-          <p:nvPr/>
-        </p:nvSpPr>
-        <p:spPr>
-          <a:xfrm>
-            <a:off x="731520" y="3977640"/>
-            <a:ext cx="10728655" cy="960120"/>
-          </a:xfrm>
-          <a:prstGeom prst="rect">
-            <a:avLst/>
-          </a:prstGeom>
-          <a:solidFill>
-            <a:srgbClr val="F4F8F5"/>
-          </a:solidFill>
-          <a:ln>
-            <a:solidFill>
-              <a:srgbClr val="1B7A43"/>
-            </a:solidFill>
-          </a:ln>
-          <a:effectLst/>
-        </p:spPr>
-        <p:style>
-          <a:lnRef idx="1">
-            <a:schemeClr val="accent1"/>
-          </a:lnRef>
-          <a:fillRef idx="3">
-            <a:schemeClr val="accent1"/>
-          </a:fillRef>
-          <a:effectRef idx="2">
-            <a:schemeClr val="accent1"/>
-          </a:effectRef>
-          <a:fontRef idx="minor">
-            <a:schemeClr val="lt1"/>
-          </a:fontRef>
-        </p:style>
-        <p:txBody>
-          <a:bodyPr rtlCol="0" anchor="ctr" wrap="square"/>
-          <a:lstStyle/>
-          <a:p>
-            <a:pPr algn="ctr"/>
-            <a:r>
-              <a:rPr sz="1200">
-                <a:solidFill>
-                  <a:srgbClr val="33403A"/>
-                </a:solidFill>
-                <a:latin typeface="Segoe UI"/>
-              </a:rPr>
-              <a:t>THE THRESHOLD IS A DECISION, NOT A FACT — "Lit area" moves when you move the threshold. At 0.1 nW·cm⁻²·sr⁻¹ a country may be
-40 % lit; at 5.0, 6 %.  Publish the threshold next to the number, every time.</a:t>
-            </a:r>
-          </a:p>
-        </p:txBody>
-      </p:sp>
-      <p:sp>
-        <p:nvSpPr>
-          <p:cNvPr id="9" name="TextBox 8"/>
           <p:cNvSpPr txBox="1"/>
           <p:nvPr/>
         </p:nvSpPr>
@@ -3669,18 +3522,17 @@
         <p:spPr>
           <a:xfrm>
             <a:off x="0" y="0"/>
-            <a:ext cx="12191695" cy="6858000"/>
+            <a:ext cx="12191695" cy="60000"/>
           </a:xfrm>
           <a:prstGeom prst="rect">
             <a:avLst/>
           </a:prstGeom>
           <a:solidFill>
-            <a:srgbClr val="0B2545"/>
+            <a:srgbClr val="F2A900"/>
           </a:solidFill>
           <a:ln>
             <a:noFill/>
           </a:ln>
-          <a:effectLst/>
         </p:spPr>
         <p:style>
           <a:lnRef idx="1">
@@ -3713,7 +3565,7 @@
         <p:spPr>
           <a:xfrm>
             <a:off x="731520" y="502920"/>
-            <a:ext cx="10728655" cy="320040"/>
+            <a:ext cx="10728655" cy="914400"/>
           </a:xfrm>
           <a:prstGeom prst="rect">
             <a:avLst/>
@@ -3728,13 +3580,13 @@
           <a:p>
             <a:pPr algn="l"/>
             <a:r>
-              <a:rPr sz="1100" b="1">
-                <a:solidFill>
-                  <a:srgbClr val="F2A900"/>
-                </a:solidFill>
-                <a:latin typeface="Segoe UI"/>
-              </a:rPr>
-              <a:t>PART 3</a:t>
+              <a:rPr sz="2800" b="1">
+                <a:solidFill>
+                  <a:srgbClr val="0B2545"/>
+                </a:solidFill>
+                <a:latin typeface="Segoe UI"/>
+              </a:rPr>
+              <a:t>The pipeline, end to end</a:t>
             </a:r>
           </a:p>
         </p:txBody>
@@ -3747,8 +3599,8 @@
         </p:nvSpPr>
         <p:spPr>
           <a:xfrm>
-            <a:off x="731520" y="914400"/>
-            <a:ext cx="10728655" cy="914400"/>
+            <a:off x="731520" y="1371600"/>
+            <a:ext cx="10728655" cy="640080"/>
           </a:xfrm>
           <a:prstGeom prst="rect">
             <a:avLst/>
@@ -3763,13 +3615,13 @@
           <a:p>
             <a:pPr algn="l"/>
             <a:r>
-              <a:rPr sz="2800" b="1">
-                <a:solidFill>
-                  <a:srgbClr val="FFFFFF"/>
-                </a:solidFill>
-                <a:latin typeface="Segoe UI"/>
-              </a:rPr>
-              <a:t>The six artefacts</a:t>
+              <a:rPr sz="1100" b="0">
+                <a:solidFill>
+                  <a:srgbClr val="6B7B75"/>
+                </a:solidFill>
+                <a:latin typeface="Segoe UI"/>
+              </a:rPr>
+              <a:t>FIGURE — screenshot slide 11 of the HTML deck and paste it here.  (Step 5 is not a formality. It is the step that decides whether your country can disseminate this.)</a:t>
             </a:r>
           </a:p>
         </p:txBody>
@@ -3777,41 +3629,6 @@
       <p:sp>
         <p:nvSpPr>
           <p:cNvPr id="5" name="TextBox 4"/>
-          <p:cNvSpPr txBox="1"/>
-          <p:nvPr/>
-        </p:nvSpPr>
-        <p:spPr>
-          <a:xfrm>
-            <a:off x="731520" y="1783080"/>
-            <a:ext cx="10728655" cy="548640"/>
-          </a:xfrm>
-          <a:prstGeom prst="rect">
-            <a:avLst/>
-          </a:prstGeom>
-          <a:noFill/>
-        </p:spPr>
-        <p:txBody>
-          <a:bodyPr wrap="square">
-            <a:spAutoFit/>
-          </a:bodyPr>
-          <a:lstStyle/>
-          <a:p>
-            <a:pPr algn="l"/>
-            <a:r>
-              <a:rPr sz="1400" b="0">
-                <a:solidFill>
-                  <a:srgbClr val="DBE7E0"/>
-                </a:solidFill>
-                <a:latin typeface="Segoe UI"/>
-              </a:rPr>
-              <a:t>Named here. Met hands-on at 10:30, in your own country's raster.</a:t>
-            </a:r>
-          </a:p>
-        </p:txBody>
-      </p:sp>
-      <p:sp>
-        <p:nvSpPr>
-          <p:cNvPr id="6" name="TextBox 5"/>
           <p:cNvSpPr txBox="1"/>
           <p:nvPr/>
         </p:nvSpPr>
@@ -3871,18 +3688,17 @@
         <p:spPr>
           <a:xfrm>
             <a:off x="0" y="0"/>
-            <a:ext cx="12191695" cy="6858000"/>
+            <a:ext cx="12191695" cy="60000"/>
           </a:xfrm>
           <a:prstGeom prst="rect">
             <a:avLst/>
           </a:prstGeom>
           <a:solidFill>
-            <a:srgbClr val="08090F"/>
+            <a:srgbClr val="F2A900"/>
           </a:solidFill>
           <a:ln>
             <a:noFill/>
           </a:ln>
-          <a:effectLst/>
         </p:spPr>
         <p:style>
           <a:lnRef idx="1">
@@ -3932,24 +3748,130 @@
             <a:r>
               <a:rPr sz="2800" b="1">
                 <a:solidFill>
-                  <a:srgbClr val="FFFFFF"/>
-                </a:solidFill>
-                <a:latin typeface="Segoe UI"/>
-              </a:rPr>
-              <a:t>What the sensor sees that you did not ask for</a:t>
-            </a:r>
-          </a:p>
-        </p:txBody>
-      </p:sp>
-      <p:sp>
-        <p:nvSpPr>
-          <p:cNvPr id="4" name="Rectangle 3"/>
+                  <a:srgbClr val="0B2545"/>
+                </a:solidFill>
+                <a:latin typeface="Segoe UI"/>
+              </a:rPr>
+              <a:t>Three numbers, three different questions</a:t>
+            </a:r>
+          </a:p>
+        </p:txBody>
+      </p:sp>
+      <p:sp>
+        <p:nvSpPr>
+          <p:cNvPr id="4" name="TextBox 3"/>
+          <p:cNvSpPr txBox="1"/>
+          <p:nvPr/>
+        </p:nvSpPr>
+        <p:spPr>
+          <a:xfrm>
+            <a:off x="731520" y="1371600"/>
+            <a:ext cx="10728655" cy="548640"/>
+          </a:xfrm>
+          <a:prstGeom prst="rect">
+            <a:avLst/>
+          </a:prstGeom>
+          <a:noFill/>
+        </p:spPr>
+        <p:txBody>
+          <a:bodyPr wrap="square">
+            <a:spAutoFit/>
+          </a:bodyPr>
+          <a:lstStyle/>
+          <a:p>
+            <a:pPr algn="l"/>
+            <a:r>
+              <a:rPr sz="1400" b="0">
+                <a:solidFill>
+                  <a:srgbClr val="33403A"/>
+                </a:solidFill>
+                <a:latin typeface="Segoe UI"/>
+              </a:rPr>
+              <a:t>Total radiance over an area.</a:t>
+            </a:r>
+          </a:p>
+        </p:txBody>
+      </p:sp>
+      <p:sp>
+        <p:nvSpPr>
+          <p:cNvPr id="5" name="TextBox 4"/>
+          <p:cNvSpPr txBox="1"/>
+          <p:nvPr/>
+        </p:nvSpPr>
+        <p:spPr>
+          <a:xfrm>
+            <a:off x="731520" y="1874520"/>
+            <a:ext cx="10728655" cy="548640"/>
+          </a:xfrm>
+          <a:prstGeom prst="rect">
+            <a:avLst/>
+          </a:prstGeom>
+          <a:noFill/>
+        </p:spPr>
+        <p:txBody>
+          <a:bodyPr wrap="square">
+            <a:spAutoFit/>
+          </a:bodyPr>
+          <a:lstStyle/>
+          <a:p>
+            <a:pPr algn="l"/>
+            <a:r>
+              <a:rPr sz="1400" b="0">
+                <a:solidFill>
+                  <a:srgbClr val="33403A"/>
+                </a:solidFill>
+                <a:latin typeface="Segoe UI"/>
+              </a:rPr>
+              <a:t>How much lit activity? 
+Dominated by cities.</a:t>
+            </a:r>
+          </a:p>
+        </p:txBody>
+      </p:sp>
+      <p:sp>
+        <p:nvSpPr>
+          <p:cNvPr id="6" name="TextBox 5"/>
+          <p:cNvSpPr txBox="1"/>
+          <p:nvPr/>
+        </p:nvSpPr>
+        <p:spPr>
+          <a:xfrm>
+            <a:off x="731520" y="2377440"/>
+            <a:ext cx="10728655" cy="548640"/>
+          </a:xfrm>
+          <a:prstGeom prst="rect">
+            <a:avLst/>
+          </a:prstGeom>
+          <a:noFill/>
+        </p:spPr>
+        <p:txBody>
+          <a:bodyPr wrap="square">
+            <a:spAutoFit/>
+          </a:bodyPr>
+          <a:lstStyle/>
+          <a:p>
+            <a:pPr algn="l"/>
+            <a:r>
+              <a:rPr sz="1400" b="0">
+                <a:solidFill>
+                  <a:srgbClr val="33403A"/>
+                </a:solidFill>
+                <a:latin typeface="Segoe UI"/>
+              </a:rPr>
+              <a:t>Share of territory above a threshold.</a:t>
+            </a:r>
+          </a:p>
+        </p:txBody>
+      </p:sp>
+      <p:sp>
+        <p:nvSpPr>
+          <p:cNvPr id="7" name="Rectangle 6"/>
           <p:cNvSpPr/>
           <p:nvPr/>
         </p:nvSpPr>
         <p:spPr>
           <a:xfrm>
-            <a:off x="731520" y="1371600"/>
+            <a:off x="731520" y="2880360"/>
             <a:ext cx="10728655" cy="960120"/>
           </a:xfrm>
           <a:prstGeom prst="rect">
@@ -3991,51 +3913,15 @@
                 </a:solidFill>
                 <a:latin typeface="Segoe UI"/>
               </a:rPr>
-              <a:t>PLUS TWO YOU WILL NOT SEE TODAY — Seasonality  — cloud, aerosols, moonlight and harmattan dust move
-monthly series; annual composites hide it.  Sensor discontinuity  —
-the DMSP/VIIRS join, discussed earlier.</a:t>
-            </a:r>
-          </a:p>
-        </p:txBody>
-      </p:sp>
-      <p:sp>
-        <p:nvSpPr>
-          <p:cNvPr id="5" name="TextBox 4"/>
-          <p:cNvSpPr txBox="1"/>
-          <p:nvPr/>
-        </p:nvSpPr>
-        <p:spPr>
-          <a:xfrm>
-            <a:off x="731520" y="2468880"/>
-            <a:ext cx="10728655" cy="640080"/>
-          </a:xfrm>
-          <a:prstGeom prst="rect">
-            <a:avLst/>
-          </a:prstGeom>
-          <a:noFill/>
-        </p:spPr>
-        <p:txBody>
-          <a:bodyPr wrap="square">
-            <a:spAutoFit/>
-          </a:bodyPr>
-          <a:lstStyle/>
-          <a:p>
-            <a:pPr algn="l"/>
-            <a:r>
-              <a:rPr sz="1100" b="0">
-                <a:solidFill>
-                  <a:srgbClr val="6B7B75"/>
-                </a:solidFill>
-                <a:latin typeface="Segoe UI"/>
-              </a:rPr>
-              <a:t>FIGURE — screenshot slide 12 of the HTML deck and paste it here.</a:t>
-            </a:r>
-          </a:p>
-        </p:txBody>
-      </p:sp>
-      <p:sp>
-        <p:nvSpPr>
-          <p:cNvPr id="6" name="TextBox 5"/>
+              <a:t>COMPUTE ALL THREE, ALWAYS — They can move in opposite directions in the same country, in the same year — and
+that divergence is the finding.</a:t>
+            </a:r>
+          </a:p>
+        </p:txBody>
+      </p:sp>
+      <p:sp>
+        <p:nvSpPr>
+          <p:cNvPr id="8" name="TextBox 7"/>
           <p:cNvSpPr txBox="1"/>
           <p:nvPr/>
         </p:nvSpPr>
@@ -4138,7 +4024,7 @@
         <p:spPr>
           <a:xfrm>
             <a:off x="731520" y="502920"/>
-            <a:ext cx="10728655" cy="914400"/>
+            <a:ext cx="10728655" cy="320040"/>
           </a:xfrm>
           <a:prstGeom prst="rect">
             <a:avLst/>
@@ -4153,26 +4039,62 @@
           <a:p>
             <a:pPr algn="l"/>
             <a:r>
-              <a:rPr sz="2800" b="1">
-                <a:solidFill>
-                  <a:srgbClr val="0B2545"/>
-                </a:solidFill>
-                <a:latin typeface="Segoe UI"/>
-              </a:rPr>
-              <a:t>Three ways a night-time lights study goes wrong</a:t>
-            </a:r>
-          </a:p>
-        </p:txBody>
-      </p:sp>
-      <p:sp>
-        <p:nvSpPr>
-          <p:cNvPr id="4" name="Rectangle 3"/>
+              <a:rPr sz="1100" b="1">
+                <a:solidFill>
+                  <a:srgbClr val="1B7A43"/>
+                </a:solidFill>
+                <a:latin typeface="Segoe UI"/>
+              </a:rPr>
+              <a:t>A NUMBER YOU MUST PUBLISH ALONGSIDE</a:t>
+            </a:r>
+          </a:p>
+        </p:txBody>
+      </p:sp>
+      <p:sp>
+        <p:nvSpPr>
+          <p:cNvPr id="4" name="TextBox 3"/>
+          <p:cNvSpPr txBox="1"/>
+          <p:nvPr/>
+        </p:nvSpPr>
+        <p:spPr>
+          <a:xfrm>
+            <a:off x="731520" y="914400"/>
+            <a:ext cx="10728655" cy="548640"/>
+          </a:xfrm>
+          <a:prstGeom prst="rect">
+            <a:avLst/>
+          </a:prstGeom>
+          <a:noFill/>
+        </p:spPr>
+        <p:txBody>
+          <a:bodyPr wrap="square">
+            <a:spAutoFit/>
+          </a:bodyPr>
+          <a:lstStyle/>
+          <a:p>
+            <a:pPr algn="l"/>
+            <a:r>
+              <a:rPr sz="1400" b="0">
+                <a:solidFill>
+                  <a:srgbClr val="33403A"/>
+                </a:solidFill>
+                <a:latin typeface="Segoe UI"/>
+              </a:rPr>
+              <a:t>At 0.1 nW·cm⁻²·sr⁻¹ a country may be 40 % lit. At 5.0, six per cent.
+Same country, same year, same satellite.</a:t>
+            </a:r>
+          </a:p>
+        </p:txBody>
+      </p:sp>
+      <p:sp>
+        <p:nvSpPr>
+          <p:cNvPr id="5" name="Rectangle 4"/>
           <p:cNvSpPr/>
           <p:nvPr/>
         </p:nvSpPr>
         <p:spPr>
           <a:xfrm>
-            <a:off x="731520" y="1371600"/>
+            <a:off x="731520" y="1417320"/>
             <a:ext cx="10728655" cy="960120"/>
           </a:xfrm>
           <a:prstGeom prst="rect">
@@ -4214,9 +4136,619 @@
                 </a:solidFill>
                 <a:latin typeface="Segoe UI"/>
               </a:rPr>
-              <a:t>NONE OF THESE ARE VISIBLE IN THE OUTPUT TABLE — All three produce a well-formatted, plausible number. That is why the exploration
-laboratory comes  before  the analysis laboratory, and why the artefact
-inventory is a deliverable rather than an optional extra.</a:t>
+              <a:t>THE RULE — Publish the threshold next to the number. Every time, without exception.</a:t>
+            </a:r>
+          </a:p>
+        </p:txBody>
+      </p:sp>
+      <p:sp>
+        <p:nvSpPr>
+          <p:cNvPr id="6" name="TextBox 5"/>
+          <p:cNvSpPr txBox="1"/>
+          <p:nvPr/>
+        </p:nvSpPr>
+        <p:spPr>
+          <a:xfrm>
+            <a:off x="731520" y="6400800"/>
+            <a:ext cx="10728655" cy="274320"/>
+          </a:xfrm>
+          <a:prstGeom prst="rect">
+            <a:avLst/>
+          </a:prstGeom>
+          <a:noFill/>
+        </p:spPr>
+        <p:txBody>
+          <a:bodyPr wrap="square">
+            <a:spAutoFit/>
+          </a:bodyPr>
+          <a:lstStyle/>
+          <a:p>
+            <a:pPr algn="l"/>
+            <a:r>
+              <a:rPr sz="900" b="0">
+                <a:solidFill>
+                  <a:srgbClr val="6B7B75"/>
+                </a:solidFill>
+                <a:latin typeface="Segoe UI"/>
+              </a:rPr>
+              <a:t>African Development Bank · AU STATAFRIC · STG17</a:t>
+            </a:r>
+          </a:p>
+        </p:txBody>
+      </p:sp>
+    </p:spTree>
+  </p:cSld>
+  <p:clrMapOvr>
+    <a:masterClrMapping/>
+  </p:clrMapOvr>
+</p:sld>
+</file>
+
+<file path=ppt/slides/slide14.xml><?xml version="1.0" encoding="utf-8"?>
+<p:sld xmlns:a="http://schemas.openxmlformats.org/drawingml/2006/main" xmlns:p="http://schemas.openxmlformats.org/presentationml/2006/main" xmlns:r="http://schemas.openxmlformats.org/officeDocument/2006/relationships">
+  <p:cSld>
+    <p:spTree>
+      <p:nvGrpSpPr>
+        <p:cNvPr id="1" name=""/>
+        <p:cNvGrpSpPr/>
+        <p:nvPr/>
+      </p:nvGrpSpPr>
+      <p:grpSpPr/>
+      <p:sp>
+        <p:nvSpPr>
+          <p:cNvPr id="2" name="Rectangle 1"/>
+          <p:cNvSpPr/>
+          <p:nvPr/>
+        </p:nvSpPr>
+        <p:spPr>
+          <a:xfrm>
+            <a:off x="0" y="0"/>
+            <a:ext cx="12191695" cy="6858000"/>
+          </a:xfrm>
+          <a:prstGeom prst="rect">
+            <a:avLst/>
+          </a:prstGeom>
+          <a:solidFill>
+            <a:srgbClr val="0B2545"/>
+          </a:solidFill>
+          <a:ln>
+            <a:noFill/>
+          </a:ln>
+          <a:effectLst/>
+        </p:spPr>
+        <p:style>
+          <a:lnRef idx="1">
+            <a:schemeClr val="accent1"/>
+          </a:lnRef>
+          <a:fillRef idx="3">
+            <a:schemeClr val="accent1"/>
+          </a:fillRef>
+          <a:effectRef idx="2">
+            <a:schemeClr val="accent1"/>
+          </a:effectRef>
+          <a:fontRef idx="minor">
+            <a:schemeClr val="lt1"/>
+          </a:fontRef>
+        </p:style>
+        <p:txBody>
+          <a:bodyPr rtlCol="0" anchor="ctr"/>
+          <a:lstStyle/>
+          <a:p>
+            <a:pPr algn="ctr"/>
+          </a:p>
+        </p:txBody>
+      </p:sp>
+      <p:sp>
+        <p:nvSpPr>
+          <p:cNvPr id="3" name="TextBox 2"/>
+          <p:cNvSpPr txBox="1"/>
+          <p:nvPr/>
+        </p:nvSpPr>
+        <p:spPr>
+          <a:xfrm>
+            <a:off x="731520" y="502920"/>
+            <a:ext cx="10728655" cy="320040"/>
+          </a:xfrm>
+          <a:prstGeom prst="rect">
+            <a:avLst/>
+          </a:prstGeom>
+          <a:noFill/>
+        </p:spPr>
+        <p:txBody>
+          <a:bodyPr wrap="square">
+            <a:spAutoFit/>
+          </a:bodyPr>
+          <a:lstStyle/>
+          <a:p>
+            <a:pPr algn="l"/>
+            <a:r>
+              <a:rPr sz="1100" b="1">
+                <a:solidFill>
+                  <a:srgbClr val="F2A900"/>
+                </a:solidFill>
+                <a:latin typeface="Segoe UI"/>
+              </a:rPr>
+              <a:t>PART 3</a:t>
+            </a:r>
+          </a:p>
+        </p:txBody>
+      </p:sp>
+      <p:sp>
+        <p:nvSpPr>
+          <p:cNvPr id="4" name="TextBox 3"/>
+          <p:cNvSpPr txBox="1"/>
+          <p:nvPr/>
+        </p:nvSpPr>
+        <p:spPr>
+          <a:xfrm>
+            <a:off x="731520" y="914400"/>
+            <a:ext cx="10728655" cy="914400"/>
+          </a:xfrm>
+          <a:prstGeom prst="rect">
+            <a:avLst/>
+          </a:prstGeom>
+          <a:noFill/>
+        </p:spPr>
+        <p:txBody>
+          <a:bodyPr wrap="square">
+            <a:spAutoFit/>
+          </a:bodyPr>
+          <a:lstStyle/>
+          <a:p>
+            <a:pPr algn="l"/>
+            <a:r>
+              <a:rPr sz="2800" b="1">
+                <a:solidFill>
+                  <a:srgbClr val="FFFFFF"/>
+                </a:solidFill>
+                <a:latin typeface="Segoe UI"/>
+              </a:rPr>
+              <a:t>The six artefacts</a:t>
+            </a:r>
+          </a:p>
+        </p:txBody>
+      </p:sp>
+      <p:sp>
+        <p:nvSpPr>
+          <p:cNvPr id="5" name="TextBox 4"/>
+          <p:cNvSpPr txBox="1"/>
+          <p:nvPr/>
+        </p:nvSpPr>
+        <p:spPr>
+          <a:xfrm>
+            <a:off x="731520" y="1783080"/>
+            <a:ext cx="10728655" cy="548640"/>
+          </a:xfrm>
+          <a:prstGeom prst="rect">
+            <a:avLst/>
+          </a:prstGeom>
+          <a:noFill/>
+        </p:spPr>
+        <p:txBody>
+          <a:bodyPr wrap="square">
+            <a:spAutoFit/>
+          </a:bodyPr>
+          <a:lstStyle/>
+          <a:p>
+            <a:pPr algn="l"/>
+            <a:r>
+              <a:rPr sz="1400" b="0">
+                <a:solidFill>
+                  <a:srgbClr val="DBE7E0"/>
+                </a:solidFill>
+                <a:latin typeface="Segoe UI"/>
+              </a:rPr>
+              <a:t>Named here. Met hands-on at 10:30, in your own country's raster.</a:t>
+            </a:r>
+          </a:p>
+        </p:txBody>
+      </p:sp>
+      <p:sp>
+        <p:nvSpPr>
+          <p:cNvPr id="6" name="TextBox 5"/>
+          <p:cNvSpPr txBox="1"/>
+          <p:nvPr/>
+        </p:nvSpPr>
+        <p:spPr>
+          <a:xfrm>
+            <a:off x="731520" y="6400800"/>
+            <a:ext cx="10728655" cy="274320"/>
+          </a:xfrm>
+          <a:prstGeom prst="rect">
+            <a:avLst/>
+          </a:prstGeom>
+          <a:noFill/>
+        </p:spPr>
+        <p:txBody>
+          <a:bodyPr wrap="square">
+            <a:spAutoFit/>
+          </a:bodyPr>
+          <a:lstStyle/>
+          <a:p>
+            <a:pPr algn="l"/>
+            <a:r>
+              <a:rPr sz="900" b="0">
+                <a:solidFill>
+                  <a:srgbClr val="6B7B75"/>
+                </a:solidFill>
+                <a:latin typeface="Segoe UI"/>
+              </a:rPr>
+              <a:t>African Development Bank · AU STATAFRIC · STG17</a:t>
+            </a:r>
+          </a:p>
+        </p:txBody>
+      </p:sp>
+    </p:spTree>
+  </p:cSld>
+  <p:clrMapOvr>
+    <a:masterClrMapping/>
+  </p:clrMapOvr>
+</p:sld>
+</file>
+
+<file path=ppt/slides/slide15.xml><?xml version="1.0" encoding="utf-8"?>
+<p:sld xmlns:a="http://schemas.openxmlformats.org/drawingml/2006/main" xmlns:p="http://schemas.openxmlformats.org/presentationml/2006/main" xmlns:r="http://schemas.openxmlformats.org/officeDocument/2006/relationships">
+  <p:cSld>
+    <p:spTree>
+      <p:nvGrpSpPr>
+        <p:cNvPr id="1" name=""/>
+        <p:cNvGrpSpPr/>
+        <p:nvPr/>
+      </p:nvGrpSpPr>
+      <p:grpSpPr/>
+      <p:sp>
+        <p:nvSpPr>
+          <p:cNvPr id="2" name="Rectangle 1"/>
+          <p:cNvSpPr/>
+          <p:nvPr/>
+        </p:nvSpPr>
+        <p:spPr>
+          <a:xfrm>
+            <a:off x="0" y="0"/>
+            <a:ext cx="12191695" cy="6858000"/>
+          </a:xfrm>
+          <a:prstGeom prst="rect">
+            <a:avLst/>
+          </a:prstGeom>
+          <a:solidFill>
+            <a:srgbClr val="08090F"/>
+          </a:solidFill>
+          <a:ln>
+            <a:noFill/>
+          </a:ln>
+          <a:effectLst/>
+        </p:spPr>
+        <p:style>
+          <a:lnRef idx="1">
+            <a:schemeClr val="accent1"/>
+          </a:lnRef>
+          <a:fillRef idx="3">
+            <a:schemeClr val="accent1"/>
+          </a:fillRef>
+          <a:effectRef idx="2">
+            <a:schemeClr val="accent1"/>
+          </a:effectRef>
+          <a:fontRef idx="minor">
+            <a:schemeClr val="lt1"/>
+          </a:fontRef>
+        </p:style>
+        <p:txBody>
+          <a:bodyPr rtlCol="0" anchor="ctr"/>
+          <a:lstStyle/>
+          <a:p>
+            <a:pPr algn="ctr"/>
+          </a:p>
+        </p:txBody>
+      </p:sp>
+      <p:sp>
+        <p:nvSpPr>
+          <p:cNvPr id="3" name="TextBox 2"/>
+          <p:cNvSpPr txBox="1"/>
+          <p:nvPr/>
+        </p:nvSpPr>
+        <p:spPr>
+          <a:xfrm>
+            <a:off x="731520" y="502920"/>
+            <a:ext cx="10728655" cy="914400"/>
+          </a:xfrm>
+          <a:prstGeom prst="rect">
+            <a:avLst/>
+          </a:prstGeom>
+          <a:noFill/>
+        </p:spPr>
+        <p:txBody>
+          <a:bodyPr wrap="square">
+            <a:spAutoFit/>
+          </a:bodyPr>
+          <a:lstStyle/>
+          <a:p>
+            <a:pPr algn="l"/>
+            <a:r>
+              <a:rPr sz="2800" b="1">
+                <a:solidFill>
+                  <a:srgbClr val="FFFFFF"/>
+                </a:solidFill>
+                <a:latin typeface="Segoe UI"/>
+              </a:rPr>
+              <a:t>What the sensor sees that you did not ask for</a:t>
+            </a:r>
+          </a:p>
+        </p:txBody>
+      </p:sp>
+      <p:sp>
+        <p:nvSpPr>
+          <p:cNvPr id="4" name="Rectangle 3"/>
+          <p:cNvSpPr/>
+          <p:nvPr/>
+        </p:nvSpPr>
+        <p:spPr>
+          <a:xfrm>
+            <a:off x="731520" y="1371600"/>
+            <a:ext cx="10728655" cy="960120"/>
+          </a:xfrm>
+          <a:prstGeom prst="rect">
+            <a:avLst/>
+          </a:prstGeom>
+          <a:solidFill>
+            <a:srgbClr val="F4F8F5"/>
+          </a:solidFill>
+          <a:ln>
+            <a:solidFill>
+              <a:srgbClr val="1B7A43"/>
+            </a:solidFill>
+          </a:ln>
+          <a:effectLst/>
+        </p:spPr>
+        <p:style>
+          <a:lnRef idx="1">
+            <a:schemeClr val="accent1"/>
+          </a:lnRef>
+          <a:fillRef idx="3">
+            <a:schemeClr val="accent1"/>
+          </a:fillRef>
+          <a:effectRef idx="2">
+            <a:schemeClr val="accent1"/>
+          </a:effectRef>
+          <a:fontRef idx="minor">
+            <a:schemeClr val="lt1"/>
+          </a:fontRef>
+        </p:style>
+        <p:txBody>
+          <a:bodyPr rtlCol="0" anchor="ctr" wrap="square"/>
+          <a:lstStyle/>
+          <a:p>
+            <a:pPr algn="ctr"/>
+            <a:r>
+              <a:rPr sz="1200">
+                <a:solidFill>
+                  <a:srgbClr val="33403A"/>
+                </a:solidFill>
+                <a:latin typeface="Segoe UI"/>
+              </a:rPr>
+              <a:t>PLUS TWO YOU WILL NOT SEE TODAY — Seasonality  — cloud, aerosols, moonlight and harmattan dust move
+monthly series; annual composites hide it.  Sensor discontinuity  —
+the DMSP/VIIRS join, discussed earlier.</a:t>
+            </a:r>
+          </a:p>
+        </p:txBody>
+      </p:sp>
+      <p:sp>
+        <p:nvSpPr>
+          <p:cNvPr id="5" name="TextBox 4"/>
+          <p:cNvSpPr txBox="1"/>
+          <p:nvPr/>
+        </p:nvSpPr>
+        <p:spPr>
+          <a:xfrm>
+            <a:off x="731520" y="2468880"/>
+            <a:ext cx="10728655" cy="640080"/>
+          </a:xfrm>
+          <a:prstGeom prst="rect">
+            <a:avLst/>
+          </a:prstGeom>
+          <a:noFill/>
+        </p:spPr>
+        <p:txBody>
+          <a:bodyPr wrap="square">
+            <a:spAutoFit/>
+          </a:bodyPr>
+          <a:lstStyle/>
+          <a:p>
+            <a:pPr algn="l"/>
+            <a:r>
+              <a:rPr sz="1100" b="0">
+                <a:solidFill>
+                  <a:srgbClr val="6B7B75"/>
+                </a:solidFill>
+                <a:latin typeface="Segoe UI"/>
+              </a:rPr>
+              <a:t>FIGURE — screenshot slide 15 of the HTML deck and paste it here.</a:t>
+            </a:r>
+          </a:p>
+        </p:txBody>
+      </p:sp>
+      <p:sp>
+        <p:nvSpPr>
+          <p:cNvPr id="6" name="TextBox 5"/>
+          <p:cNvSpPr txBox="1"/>
+          <p:nvPr/>
+        </p:nvSpPr>
+        <p:spPr>
+          <a:xfrm>
+            <a:off x="731520" y="6400800"/>
+            <a:ext cx="10728655" cy="274320"/>
+          </a:xfrm>
+          <a:prstGeom prst="rect">
+            <a:avLst/>
+          </a:prstGeom>
+          <a:noFill/>
+        </p:spPr>
+        <p:txBody>
+          <a:bodyPr wrap="square">
+            <a:spAutoFit/>
+          </a:bodyPr>
+          <a:lstStyle/>
+          <a:p>
+            <a:pPr algn="l"/>
+            <a:r>
+              <a:rPr sz="900" b="0">
+                <a:solidFill>
+                  <a:srgbClr val="6B7B75"/>
+                </a:solidFill>
+                <a:latin typeface="Segoe UI"/>
+              </a:rPr>
+              <a:t>African Development Bank · AU STATAFRIC · STG17</a:t>
+            </a:r>
+          </a:p>
+        </p:txBody>
+      </p:sp>
+    </p:spTree>
+  </p:cSld>
+  <p:clrMapOvr>
+    <a:masterClrMapping/>
+  </p:clrMapOvr>
+</p:sld>
+</file>
+
+<file path=ppt/slides/slide16.xml><?xml version="1.0" encoding="utf-8"?>
+<p:sld xmlns:a="http://schemas.openxmlformats.org/drawingml/2006/main" xmlns:p="http://schemas.openxmlformats.org/presentationml/2006/main" xmlns:r="http://schemas.openxmlformats.org/officeDocument/2006/relationships">
+  <p:cSld>
+    <p:spTree>
+      <p:nvGrpSpPr>
+        <p:cNvPr id="1" name=""/>
+        <p:cNvGrpSpPr/>
+        <p:nvPr/>
+      </p:nvGrpSpPr>
+      <p:grpSpPr/>
+      <p:sp>
+        <p:nvSpPr>
+          <p:cNvPr id="2" name="Rectangle 1"/>
+          <p:cNvSpPr/>
+          <p:nvPr/>
+        </p:nvSpPr>
+        <p:spPr>
+          <a:xfrm>
+            <a:off x="0" y="0"/>
+            <a:ext cx="12191695" cy="60000"/>
+          </a:xfrm>
+          <a:prstGeom prst="rect">
+            <a:avLst/>
+          </a:prstGeom>
+          <a:solidFill>
+            <a:srgbClr val="F2A900"/>
+          </a:solidFill>
+          <a:ln>
+            <a:noFill/>
+          </a:ln>
+        </p:spPr>
+        <p:style>
+          <a:lnRef idx="1">
+            <a:schemeClr val="accent1"/>
+          </a:lnRef>
+          <a:fillRef idx="3">
+            <a:schemeClr val="accent1"/>
+          </a:fillRef>
+          <a:effectRef idx="2">
+            <a:schemeClr val="accent1"/>
+          </a:effectRef>
+          <a:fontRef idx="minor">
+            <a:schemeClr val="lt1"/>
+          </a:fontRef>
+        </p:style>
+        <p:txBody>
+          <a:bodyPr rtlCol="0" anchor="ctr"/>
+          <a:lstStyle/>
+          <a:p>
+            <a:pPr algn="ctr"/>
+          </a:p>
+        </p:txBody>
+      </p:sp>
+      <p:sp>
+        <p:nvSpPr>
+          <p:cNvPr id="3" name="TextBox 2"/>
+          <p:cNvSpPr txBox="1"/>
+          <p:nvPr/>
+        </p:nvSpPr>
+        <p:spPr>
+          <a:xfrm>
+            <a:off x="731520" y="502920"/>
+            <a:ext cx="10728655" cy="914400"/>
+          </a:xfrm>
+          <a:prstGeom prst="rect">
+            <a:avLst/>
+          </a:prstGeom>
+          <a:noFill/>
+        </p:spPr>
+        <p:txBody>
+          <a:bodyPr wrap="square">
+            <a:spAutoFit/>
+          </a:bodyPr>
+          <a:lstStyle/>
+          <a:p>
+            <a:pPr algn="l"/>
+            <a:r>
+              <a:rPr sz="2800" b="1">
+                <a:solidFill>
+                  <a:srgbClr val="0B2545"/>
+                </a:solidFill>
+                <a:latin typeface="Segoe UI"/>
+              </a:rPr>
+              <a:t>Three ways a night-time lights study goes wrong</a:t>
+            </a:r>
+          </a:p>
+        </p:txBody>
+      </p:sp>
+      <p:sp>
+        <p:nvSpPr>
+          <p:cNvPr id="4" name="Rectangle 3"/>
+          <p:cNvSpPr/>
+          <p:nvPr/>
+        </p:nvSpPr>
+        <p:spPr>
+          <a:xfrm>
+            <a:off x="731520" y="1371600"/>
+            <a:ext cx="10728655" cy="960120"/>
+          </a:xfrm>
+          <a:prstGeom prst="rect">
+            <a:avLst/>
+          </a:prstGeom>
+          <a:solidFill>
+            <a:srgbClr val="F4F8F5"/>
+          </a:solidFill>
+          <a:ln>
+            <a:solidFill>
+              <a:srgbClr val="1B7A43"/>
+            </a:solidFill>
+          </a:ln>
+          <a:effectLst/>
+        </p:spPr>
+        <p:style>
+          <a:lnRef idx="1">
+            <a:schemeClr val="accent1"/>
+          </a:lnRef>
+          <a:fillRef idx="3">
+            <a:schemeClr val="accent1"/>
+          </a:fillRef>
+          <a:effectRef idx="2">
+            <a:schemeClr val="accent1"/>
+          </a:effectRef>
+          <a:fontRef idx="minor">
+            <a:schemeClr val="lt1"/>
+          </a:fontRef>
+        </p:style>
+        <p:txBody>
+          <a:bodyPr rtlCol="0" anchor="ctr" wrap="square"/>
+          <a:lstStyle/>
+          <a:p>
+            <a:pPr algn="ctr"/>
+            <a:r>
+              <a:rPr sz="1200">
+                <a:solidFill>
+                  <a:srgbClr val="33403A"/>
+                </a:solidFill>
+                <a:latin typeface="Segoe UI"/>
+              </a:rPr>
+              <a:t>ALL THREE PRODUCE A PLAUSIBLE, WELL-FORMATTED NUMBER — None of them is visible in the output table.</a:t>
             </a:r>
           </a:p>
         </p:txBody>
@@ -4275,7 +4807,7 @@
                           </a:solidFill>
                           <a:latin typeface="Segoe UI"/>
                         </a:rPr>
-                        <a:t>What actually happened</a:t>
+                        <a:t>What really happened</a:t>
                       </a:r>
                     </a:p>
                   </a:txBody>
@@ -4293,7 +4825,7 @@
                           </a:solidFill>
                           <a:latin typeface="Segoe UI"/>
                         </a:rPr>
-                        <a:t>The check that would have caught it</a:t>
+                        <a:t>The check that catches it</a:t>
                       </a:r>
                     </a:p>
                   </a:txBody>
@@ -4313,7 +4845,7 @@
                           </a:solidFill>
                           <a:latin typeface="Segoe UI"/>
                         </a:rPr>
-                        <a:t>"Regional GDP grew 40 % in one year"</a:t>
+                        <a:t>“Regional GDP grew 40 % in a year”</a:t>
                       </a:r>
                     </a:p>
                   </a:txBody>
@@ -4331,7 +4863,7 @@
                           </a:solidFill>
                           <a:latin typeface="Segoe UI"/>
                         </a:rPr>
-                        <a:t>The previous year was missing a satellite tile — two thirds of the territory</a:t>
+                        <a:t>A missing satellite tile the year before — two thirds of the territory</a:t>
                       </a:r>
                     </a:p>
                   </a:txBody>
@@ -4349,7 +4881,7 @@
                           </a:solidFill>
                           <a:latin typeface="Segoe UI"/>
                         </a:rPr>
-                        <a:t>The completeness audit, step 3 of this morning's laboratory</a:t>
+                        <a:t>Completeness audit  lab 1, step 3</a:t>
                       </a:r>
                     </a:p>
                   </a:txBody>
@@ -4369,7 +4901,7 @@
                           </a:solidFill>
                           <a:latin typeface="Segoe UI"/>
                         </a:rPr>
-                        <a:t>"This region is the most economically active"</a:t>
+                        <a:t>“Our most economically active region”</a:t>
                       </a:r>
                     </a:p>
                   </a:txBody>
@@ -4405,7 +4937,7 @@
                           </a:solidFill>
                           <a:latin typeface="Segoe UI"/>
                         </a:rPr>
-                        <a:t>Ranking the brightest pixels and cross-checking against a settlement map</a:t>
+                        <a:t>Rank the brightest pixels against a settlement map</a:t>
                       </a:r>
                     </a:p>
                   </a:txBody>
@@ -4425,7 +4957,7 @@
                           </a:solidFill>
                           <a:latin typeface="Segoe UI"/>
                         </a:rPr>
-                        <a:t>"Electrification stalled in the capital"</a:t>
+                        <a:t>“Electrification stalled in the capital”</a:t>
                       </a:r>
                     </a:p>
                   </a:txBody>
@@ -4443,7 +4975,7 @@
                           </a:solidFill>
                           <a:latin typeface="Segoe UI"/>
                         </a:rPr>
-                        <a:t>The capital saturated the sensor in 2018 and has been flat in the data since</a:t>
+                        <a:t>The capital saturated the sensor in 2018</a:t>
                       </a:r>
                     </a:p>
                   </a:txBody>
@@ -4461,7 +4993,7 @@
                           </a:solidFill>
                           <a:latin typeface="Segoe UI"/>
                         </a:rPr>
-                        <a:t>A cross-section through the brightest cluster — look for the flat top</a:t>
+                        <a:t>Cross-section the brightest cluster — look for a flat top</a:t>
                       </a:r>
                     </a:p>
                   </a:txBody>
@@ -4472,845 +5004,6 @@
           </a:graphicData>
         </a:graphic>
       </p:graphicFrame>
-      <p:sp>
-        <p:nvSpPr>
-          <p:cNvPr id="6" name="TextBox 5"/>
-          <p:cNvSpPr txBox="1"/>
-          <p:nvPr/>
-        </p:nvSpPr>
-        <p:spPr>
-          <a:xfrm>
-            <a:off x="731520" y="6400800"/>
-            <a:ext cx="10728655" cy="274320"/>
-          </a:xfrm>
-          <a:prstGeom prst="rect">
-            <a:avLst/>
-          </a:prstGeom>
-          <a:noFill/>
-        </p:spPr>
-        <p:txBody>
-          <a:bodyPr wrap="square">
-            <a:spAutoFit/>
-          </a:bodyPr>
-          <a:lstStyle/>
-          <a:p>
-            <a:pPr algn="l"/>
-            <a:r>
-              <a:rPr sz="900" b="0">
-                <a:solidFill>
-                  <a:srgbClr val="6B7B75"/>
-                </a:solidFill>
-                <a:latin typeface="Segoe UI"/>
-              </a:rPr>
-              <a:t>African Development Bank · AU STATAFRIC · STG17</a:t>
-            </a:r>
-          </a:p>
-        </p:txBody>
-      </p:sp>
-    </p:spTree>
-  </p:cSld>
-  <p:clrMapOvr>
-    <a:masterClrMapping/>
-  </p:clrMapOvr>
-</p:sld>
-</file>
-
-<file path=ppt/slides/slide14.xml><?xml version="1.0" encoding="utf-8"?>
-<p:sld xmlns:a="http://schemas.openxmlformats.org/drawingml/2006/main" xmlns:p="http://schemas.openxmlformats.org/presentationml/2006/main" xmlns:r="http://schemas.openxmlformats.org/officeDocument/2006/relationships">
-  <p:cSld>
-    <p:spTree>
-      <p:nvGrpSpPr>
-        <p:cNvPr id="1" name=""/>
-        <p:cNvGrpSpPr/>
-        <p:nvPr/>
-      </p:nvGrpSpPr>
-      <p:grpSpPr/>
-      <p:sp>
-        <p:nvSpPr>
-          <p:cNvPr id="2" name="Rectangle 1"/>
-          <p:cNvSpPr/>
-          <p:nvPr/>
-        </p:nvSpPr>
-        <p:spPr>
-          <a:xfrm>
-            <a:off x="0" y="0"/>
-            <a:ext cx="12191695" cy="60000"/>
-          </a:xfrm>
-          <a:prstGeom prst="rect">
-            <a:avLst/>
-          </a:prstGeom>
-          <a:solidFill>
-            <a:srgbClr val="F2A900"/>
-          </a:solidFill>
-          <a:ln>
-            <a:noFill/>
-          </a:ln>
-        </p:spPr>
-        <p:style>
-          <a:lnRef idx="1">
-            <a:schemeClr val="accent1"/>
-          </a:lnRef>
-          <a:fillRef idx="3">
-            <a:schemeClr val="accent1"/>
-          </a:fillRef>
-          <a:effectRef idx="2">
-            <a:schemeClr val="accent1"/>
-          </a:effectRef>
-          <a:fontRef idx="minor">
-            <a:schemeClr val="lt1"/>
-          </a:fontRef>
-        </p:style>
-        <p:txBody>
-          <a:bodyPr rtlCol="0" anchor="ctr"/>
-          <a:lstStyle/>
-          <a:p>
-            <a:pPr algn="ctr"/>
-          </a:p>
-        </p:txBody>
-      </p:sp>
-      <p:sp>
-        <p:nvSpPr>
-          <p:cNvPr id="3" name="TextBox 2"/>
-          <p:cNvSpPr txBox="1"/>
-          <p:nvPr/>
-        </p:nvSpPr>
-        <p:spPr>
-          <a:xfrm>
-            <a:off x="731520" y="502920"/>
-            <a:ext cx="10728655" cy="914400"/>
-          </a:xfrm>
-          <a:prstGeom prst="rect">
-            <a:avLst/>
-          </a:prstGeom>
-          <a:noFill/>
-        </p:spPr>
-        <p:txBody>
-          <a:bodyPr wrap="square">
-            <a:spAutoFit/>
-          </a:bodyPr>
-          <a:lstStyle/>
-          <a:p>
-            <a:pPr algn="l"/>
-            <a:r>
-              <a:rPr sz="2800" b="1">
-                <a:solidFill>
-                  <a:srgbClr val="0B2545"/>
-                </a:solidFill>
-                <a:latin typeface="Segoe UI"/>
-              </a:rPr>
-              <a:t>What NTL proxies well — and what it does not</a:t>
-            </a:r>
-          </a:p>
-        </p:txBody>
-      </p:sp>
-      <p:sp>
-        <p:nvSpPr>
-          <p:cNvPr id="4" name="TextBox 3"/>
-          <p:cNvSpPr txBox="1"/>
-          <p:nvPr/>
-        </p:nvSpPr>
-        <p:spPr>
-          <a:xfrm>
-            <a:off x="731520" y="1371600"/>
-            <a:ext cx="10728655" cy="4389120"/>
-          </a:xfrm>
-          <a:prstGeom prst="rect">
-            <a:avLst/>
-          </a:prstGeom>
-          <a:noFill/>
-        </p:spPr>
-        <p:txBody>
-          <a:bodyPr wrap="square">
-            <a:spAutoFit/>
-          </a:bodyPr>
-          <a:lstStyle/>
-          <a:p>
-            <a:pPr>
-              <a:spcAft>
-                <a:spcPts val="700"/>
-              </a:spcAft>
-            </a:pPr>
-            <a:r>
-              <a:rPr sz="1400">
-                <a:solidFill>
-                  <a:srgbClr val="33403A"/>
-                </a:solidFill>
-                <a:latin typeface="Segoe UI"/>
-              </a:rPr>
-              <a:t>•  Electrification progress  — where light reaches new places</a:t>
-            </a:r>
-          </a:p>
-          <a:p>
-            <a:pPr>
-              <a:spcAft>
-                <a:spcPts val="700"/>
-              </a:spcAft>
-            </a:pPr>
-            <a:r>
-              <a:rPr sz="1400">
-                <a:solidFill>
-                  <a:srgbClr val="33403A"/>
-                </a:solidFill>
-                <a:latin typeface="Segoe UI"/>
-              </a:rPr>
-              <a:t>•  Urbanisation and settlement growth</a:t>
-            </a:r>
-          </a:p>
-          <a:p>
-            <a:pPr>
-              <a:spcAft>
-                <a:spcPts val="700"/>
-              </a:spcAft>
-            </a:pPr>
-            <a:r>
-              <a:rPr sz="1400">
-                <a:solidFill>
-                  <a:srgbClr val="33403A"/>
-                </a:solidFill>
-                <a:latin typeface="Segoe UI"/>
-              </a:rPr>
-              <a:t>•  Crisis and conflict impact  — abrupt loss of light is unambiguous</a:t>
-            </a:r>
-          </a:p>
-          <a:p>
-            <a:pPr>
-              <a:spcAft>
-                <a:spcPts val="700"/>
-              </a:spcAft>
-            </a:pPr>
-            <a:r>
-              <a:rPr sz="1400">
-                <a:solidFill>
-                  <a:srgbClr val="33403A"/>
-                </a:solidFill>
-                <a:latin typeface="Segoe UI"/>
-              </a:rPr>
-              <a:t>•  Spatial inequality of infrastructure</a:t>
-            </a:r>
-          </a:p>
-          <a:p>
-            <a:pPr>
-              <a:spcAft>
-                <a:spcPts val="700"/>
-              </a:spcAft>
-            </a:pPr>
-            <a:r>
-              <a:rPr sz="1400">
-                <a:solidFill>
-                  <a:srgbClr val="33403A"/>
-                </a:solidFill>
-                <a:latin typeface="Segoe UI"/>
-              </a:rPr>
-              <a:t>•  Relative comparison between districts  in the same year</a:t>
-            </a:r>
-          </a:p>
-          <a:p>
-            <a:pPr>
-              <a:spcAft>
-                <a:spcPts val="700"/>
-              </a:spcAft>
-            </a:pPr>
-            <a:r>
-              <a:rPr sz="1400">
-                <a:solidFill>
-                  <a:srgbClr val="33403A"/>
-                </a:solidFill>
-                <a:latin typeface="Segoe UI"/>
-              </a:rPr>
-              <a:t>•  GDP in levels.  Correlated, not equal. The elasticity differs by country and by decade</a:t>
-            </a:r>
-          </a:p>
-          <a:p>
-            <a:pPr>
-              <a:spcAft>
-                <a:spcPts val="700"/>
-              </a:spcAft>
-            </a:pPr>
-            <a:r>
-              <a:rPr sz="1400">
-                <a:solidFill>
-                  <a:srgbClr val="33403A"/>
-                </a:solidFill>
-                <a:latin typeface="Segoe UI"/>
-              </a:rPr>
-              <a:t>•  Household connection rates.  A connected household that cannot afford to use power emits no light</a:t>
-            </a:r>
-          </a:p>
-          <a:p>
-            <a:pPr>
-              <a:spcAft>
-                <a:spcPts val="700"/>
-              </a:spcAft>
-            </a:pPr>
-            <a:r>
-              <a:rPr sz="1400">
-                <a:solidFill>
-                  <a:srgbClr val="33403A"/>
-                </a:solidFill>
-                <a:latin typeface="Segoe UI"/>
-              </a:rPr>
-              <a:t>•  Informal economic activity  that happens in daylight</a:t>
-            </a:r>
-          </a:p>
-          <a:p>
-            <a:pPr>
-              <a:spcAft>
-                <a:spcPts val="700"/>
-              </a:spcAft>
-            </a:pPr>
-            <a:r>
-              <a:rPr sz="1400">
-                <a:solidFill>
-                  <a:srgbClr val="33403A"/>
-                </a:solidFill>
-                <a:latin typeface="Segoe UI"/>
-              </a:rPr>
-              <a:t>•  Anything at village scale.  500 m pixels and blooming make small settlements unreliable</a:t>
-            </a:r>
-          </a:p>
-        </p:txBody>
-      </p:sp>
-      <p:sp>
-        <p:nvSpPr>
-          <p:cNvPr id="5" name="Rectangle 4"/>
-          <p:cNvSpPr/>
-          <p:nvPr/>
-        </p:nvSpPr>
-        <p:spPr>
-          <a:xfrm>
-            <a:off x="731520" y="4663440"/>
-            <a:ext cx="10728655" cy="960120"/>
-          </a:xfrm>
-          <a:prstGeom prst="rect">
-            <a:avLst/>
-          </a:prstGeom>
-          <a:solidFill>
-            <a:srgbClr val="F4F8F5"/>
-          </a:solidFill>
-          <a:ln>
-            <a:solidFill>
-              <a:srgbClr val="1B7A43"/>
-            </a:solidFill>
-          </a:ln>
-          <a:effectLst/>
-        </p:spPr>
-        <p:style>
-          <a:lnRef idx="1">
-            <a:schemeClr val="accent1"/>
-          </a:lnRef>
-          <a:fillRef idx="3">
-            <a:schemeClr val="accent1"/>
-          </a:fillRef>
-          <a:effectRef idx="2">
-            <a:schemeClr val="accent1"/>
-          </a:effectRef>
-          <a:fontRef idx="minor">
-            <a:schemeClr val="lt1"/>
-          </a:fontRef>
-        </p:style>
-        <p:txBody>
-          <a:bodyPr rtlCol="0" anchor="ctr" wrap="square"/>
-          <a:lstStyle/>
-          <a:p>
-            <a:pPr algn="ctr"/>
-            <a:r>
-              <a:rPr sz="1200">
-                <a:solidFill>
-                  <a:srgbClr val="33403A"/>
-                </a:solidFill>
-                <a:latin typeface="Segoe UI"/>
-              </a:rPr>
-              <a:t>THE HONEST FRAMING FOR A STATISTICAL OFFICE — "A spatially detailed indicator that correlates with X in our country at r = 0.NN,
-suitable for Y, not suitable for Z."  That sentence — with your own
-correlation coefficient in it — is what you will produce this afternoon.</a:t>
-            </a:r>
-          </a:p>
-        </p:txBody>
-      </p:sp>
-      <p:sp>
-        <p:nvSpPr>
-          <p:cNvPr id="6" name="TextBox 5"/>
-          <p:cNvSpPr txBox="1"/>
-          <p:nvPr/>
-        </p:nvSpPr>
-        <p:spPr>
-          <a:xfrm>
-            <a:off x="731520" y="6400800"/>
-            <a:ext cx="10728655" cy="274320"/>
-          </a:xfrm>
-          <a:prstGeom prst="rect">
-            <a:avLst/>
-          </a:prstGeom>
-          <a:noFill/>
-        </p:spPr>
-        <p:txBody>
-          <a:bodyPr wrap="square">
-            <a:spAutoFit/>
-          </a:bodyPr>
-          <a:lstStyle/>
-          <a:p>
-            <a:pPr algn="l"/>
-            <a:r>
-              <a:rPr sz="900" b="0">
-                <a:solidFill>
-                  <a:srgbClr val="6B7B75"/>
-                </a:solidFill>
-                <a:latin typeface="Segoe UI"/>
-              </a:rPr>
-              <a:t>African Development Bank · AU STATAFRIC · STG17</a:t>
-            </a:r>
-          </a:p>
-        </p:txBody>
-      </p:sp>
-    </p:spTree>
-  </p:cSld>
-  <p:clrMapOvr>
-    <a:masterClrMapping/>
-  </p:clrMapOvr>
-</p:sld>
-</file>
-
-<file path=ppt/slides/slide15.xml><?xml version="1.0" encoding="utf-8"?>
-<p:sld xmlns:a="http://schemas.openxmlformats.org/drawingml/2006/main" xmlns:p="http://schemas.openxmlformats.org/presentationml/2006/main" xmlns:r="http://schemas.openxmlformats.org/officeDocument/2006/relationships">
-  <p:cSld>
-    <p:spTree>
-      <p:nvGrpSpPr>
-        <p:cNvPr id="1" name=""/>
-        <p:cNvGrpSpPr/>
-        <p:nvPr/>
-      </p:nvGrpSpPr>
-      <p:grpSpPr/>
-      <p:sp>
-        <p:nvSpPr>
-          <p:cNvPr id="2" name="Rectangle 1"/>
-          <p:cNvSpPr/>
-          <p:nvPr/>
-        </p:nvSpPr>
-        <p:spPr>
-          <a:xfrm>
-            <a:off x="0" y="0"/>
-            <a:ext cx="12191695" cy="60000"/>
-          </a:xfrm>
-          <a:prstGeom prst="rect">
-            <a:avLst/>
-          </a:prstGeom>
-          <a:solidFill>
-            <a:srgbClr val="F2A900"/>
-          </a:solidFill>
-          <a:ln>
-            <a:noFill/>
-          </a:ln>
-        </p:spPr>
-        <p:style>
-          <a:lnRef idx="1">
-            <a:schemeClr val="accent1"/>
-          </a:lnRef>
-          <a:fillRef idx="3">
-            <a:schemeClr val="accent1"/>
-          </a:fillRef>
-          <a:effectRef idx="2">
-            <a:schemeClr val="accent1"/>
-          </a:effectRef>
-          <a:fontRef idx="minor">
-            <a:schemeClr val="lt1"/>
-          </a:fontRef>
-        </p:style>
-        <p:txBody>
-          <a:bodyPr rtlCol="0" anchor="ctr"/>
-          <a:lstStyle/>
-          <a:p>
-            <a:pPr algn="ctr"/>
-          </a:p>
-        </p:txBody>
-      </p:sp>
-      <p:sp>
-        <p:nvSpPr>
-          <p:cNvPr id="3" name="TextBox 2"/>
-          <p:cNvSpPr txBox="1"/>
-          <p:nvPr/>
-        </p:nvSpPr>
-        <p:spPr>
-          <a:xfrm>
-            <a:off x="731520" y="502920"/>
-            <a:ext cx="10728655" cy="914400"/>
-          </a:xfrm>
-          <a:prstGeom prst="rect">
-            <a:avLst/>
-          </a:prstGeom>
-          <a:noFill/>
-        </p:spPr>
-        <p:txBody>
-          <a:bodyPr wrap="square">
-            <a:spAutoFit/>
-          </a:bodyPr>
-          <a:lstStyle/>
-          <a:p>
-            <a:pPr algn="l"/>
-            <a:r>
-              <a:rPr sz="2800" b="1">
-                <a:solidFill>
-                  <a:srgbClr val="0B2545"/>
-                </a:solidFill>
-                <a:latin typeface="Segoe UI"/>
-              </a:rPr>
-              <a:t>What you will have by 17:00</a:t>
-            </a:r>
-          </a:p>
-        </p:txBody>
-      </p:sp>
-      <p:sp>
-        <p:nvSpPr>
-          <p:cNvPr id="4" name="TextBox 3"/>
-          <p:cNvSpPr txBox="1"/>
-          <p:nvPr/>
-        </p:nvSpPr>
-        <p:spPr>
-          <a:xfrm>
-            <a:off x="731520" y="1371600"/>
-            <a:ext cx="10728655" cy="548640"/>
-          </a:xfrm>
-          <a:prstGeom prst="rect">
-            <a:avLst/>
-          </a:prstGeom>
-          <a:noFill/>
-        </p:spPr>
-        <p:txBody>
-          <a:bodyPr wrap="square">
-            <a:spAutoFit/>
-          </a:bodyPr>
-          <a:lstStyle/>
-          <a:p>
-            <a:pPr algn="l"/>
-            <a:r>
-              <a:rPr sz="1400" b="0">
-                <a:solidFill>
-                  <a:srgbClr val="33403A"/>
-                </a:solidFill>
-                <a:latin typeface="Segoe UI"/>
-              </a:rPr>
-              <a:t>Every one of those goes into your country repository on Friday, with a licence,
-metadata and a DOI. Another African office should be able to take your notebook,
-change one line, and run it on their own territory.</a:t>
-            </a:r>
-          </a:p>
-        </p:txBody>
-      </p:sp>
-      <p:sp>
-        <p:nvSpPr>
-          <p:cNvPr id="5" name="TextBox 4"/>
-          <p:cNvSpPr txBox="1"/>
-          <p:nvPr/>
-        </p:nvSpPr>
-        <p:spPr>
-          <a:xfrm>
-            <a:off x="731520" y="1874520"/>
-            <a:ext cx="10728655" cy="457200"/>
-          </a:xfrm>
-          <a:prstGeom prst="rect">
-            <a:avLst/>
-          </a:prstGeom>
-          <a:noFill/>
-        </p:spPr>
-        <p:txBody>
-          <a:bodyPr wrap="square">
-            <a:spAutoFit/>
-          </a:bodyPr>
-          <a:lstStyle/>
-          <a:p>
-            <a:pPr algn="l"/>
-            <a:r>
-              <a:rPr sz="1500" b="1">
-                <a:solidFill>
-                  <a:srgbClr val="1B7A43"/>
-                </a:solidFill>
-                <a:latin typeface="Segoe UI"/>
-              </a:rPr>
-              <a:t>1  Clipped national raster</a:t>
-            </a:r>
-          </a:p>
-        </p:txBody>
-      </p:sp>
-      <p:sp>
-        <p:nvSpPr>
-          <p:cNvPr id="6" name="Rectangle 5"/>
-          <p:cNvSpPr/>
-          <p:nvPr/>
-        </p:nvSpPr>
-        <p:spPr>
-          <a:xfrm>
-            <a:off x="731520" y="2423160"/>
-            <a:ext cx="10728655" cy="960120"/>
-          </a:xfrm>
-          <a:prstGeom prst="rect">
-            <a:avLst/>
-          </a:prstGeom>
-          <a:solidFill>
-            <a:srgbClr val="F4F8F5"/>
-          </a:solidFill>
-          <a:ln>
-            <a:solidFill>
-              <a:srgbClr val="1B7A43"/>
-            </a:solidFill>
-          </a:ln>
-          <a:effectLst/>
-        </p:spPr>
-        <p:style>
-          <a:lnRef idx="1">
-            <a:schemeClr val="accent1"/>
-          </a:lnRef>
-          <a:fillRef idx="3">
-            <a:schemeClr val="accent1"/>
-          </a:fillRef>
-          <a:effectRef idx="2">
-            <a:schemeClr val="accent1"/>
-          </a:effectRef>
-          <a:fontRef idx="minor">
-            <a:schemeClr val="lt1"/>
-          </a:fontRef>
-        </p:style>
-        <p:txBody>
-          <a:bodyPr rtlCol="0" anchor="ctr" wrap="square"/>
-          <a:lstStyle/>
-          <a:p>
-            <a:pPr algn="ctr"/>
-            <a:r>
-              <a:rPr sz="1200">
-                <a:solidFill>
-                  <a:srgbClr val="33403A"/>
-                </a:solidFill>
-                <a:latin typeface="Segoe UI"/>
-              </a:rPr>
-              <a:t>ONE VARIABLE — COUNTRY_ISO3 = "CIV"  
-Boundaries, satellite tiles, projection, map extent and every figure title follow
-from it. The registry covers all 55 African Union member states.</a:t>
-            </a:r>
-          </a:p>
-        </p:txBody>
-      </p:sp>
-      <p:sp>
-        <p:nvSpPr>
-          <p:cNvPr id="7" name="TextBox 6"/>
-          <p:cNvSpPr txBox="1"/>
-          <p:nvPr/>
-        </p:nvSpPr>
-        <p:spPr>
-          <a:xfrm>
-            <a:off x="731520" y="6400800"/>
-            <a:ext cx="10728655" cy="274320"/>
-          </a:xfrm>
-          <a:prstGeom prst="rect">
-            <a:avLst/>
-          </a:prstGeom>
-          <a:noFill/>
-        </p:spPr>
-        <p:txBody>
-          <a:bodyPr wrap="square">
-            <a:spAutoFit/>
-          </a:bodyPr>
-          <a:lstStyle/>
-          <a:p>
-            <a:pPr algn="l"/>
-            <a:r>
-              <a:rPr sz="900" b="0">
-                <a:solidFill>
-                  <a:srgbClr val="6B7B75"/>
-                </a:solidFill>
-                <a:latin typeface="Segoe UI"/>
-              </a:rPr>
-              <a:t>African Development Bank · AU STATAFRIC · STG17</a:t>
-            </a:r>
-          </a:p>
-        </p:txBody>
-      </p:sp>
-    </p:spTree>
-  </p:cSld>
-  <p:clrMapOvr>
-    <a:masterClrMapping/>
-  </p:clrMapOvr>
-</p:sld>
-</file>
-
-<file path=ppt/slides/slide16.xml><?xml version="1.0" encoding="utf-8"?>
-<p:sld xmlns:a="http://schemas.openxmlformats.org/drawingml/2006/main" xmlns:p="http://schemas.openxmlformats.org/presentationml/2006/main" xmlns:r="http://schemas.openxmlformats.org/officeDocument/2006/relationships">
-  <p:cSld>
-    <p:spTree>
-      <p:nvGrpSpPr>
-        <p:cNvPr id="1" name=""/>
-        <p:cNvGrpSpPr/>
-        <p:nvPr/>
-      </p:nvGrpSpPr>
-      <p:grpSpPr/>
-      <p:sp>
-        <p:nvSpPr>
-          <p:cNvPr id="2" name="Rectangle 1"/>
-          <p:cNvSpPr/>
-          <p:nvPr/>
-        </p:nvSpPr>
-        <p:spPr>
-          <a:xfrm>
-            <a:off x="0" y="0"/>
-            <a:ext cx="12191695" cy="60000"/>
-          </a:xfrm>
-          <a:prstGeom prst="rect">
-            <a:avLst/>
-          </a:prstGeom>
-          <a:solidFill>
-            <a:srgbClr val="F2A900"/>
-          </a:solidFill>
-          <a:ln>
-            <a:noFill/>
-          </a:ln>
-        </p:spPr>
-        <p:style>
-          <a:lnRef idx="1">
-            <a:schemeClr val="accent1"/>
-          </a:lnRef>
-          <a:fillRef idx="3">
-            <a:schemeClr val="accent1"/>
-          </a:fillRef>
-          <a:effectRef idx="2">
-            <a:schemeClr val="accent1"/>
-          </a:effectRef>
-          <a:fontRef idx="minor">
-            <a:schemeClr val="lt1"/>
-          </a:fontRef>
-        </p:style>
-        <p:txBody>
-          <a:bodyPr rtlCol="0" anchor="ctr"/>
-          <a:lstStyle/>
-          <a:p>
-            <a:pPr algn="ctr"/>
-          </a:p>
-        </p:txBody>
-      </p:sp>
-      <p:sp>
-        <p:nvSpPr>
-          <p:cNvPr id="3" name="TextBox 2"/>
-          <p:cNvSpPr txBox="1"/>
-          <p:nvPr/>
-        </p:nvSpPr>
-        <p:spPr>
-          <a:xfrm>
-            <a:off x="731520" y="502920"/>
-            <a:ext cx="10728655" cy="914400"/>
-          </a:xfrm>
-          <a:prstGeom prst="rect">
-            <a:avLst/>
-          </a:prstGeom>
-          <a:noFill/>
-        </p:spPr>
-        <p:txBody>
-          <a:bodyPr wrap="square">
-            <a:spAutoFit/>
-          </a:bodyPr>
-          <a:lstStyle/>
-          <a:p>
-            <a:pPr algn="l"/>
-            <a:r>
-              <a:rPr sz="2800" b="1">
-                <a:solidFill>
-                  <a:srgbClr val="0B2545"/>
-                </a:solidFill>
-                <a:latin typeface="Segoe UI"/>
-              </a:rPr>
-              <a:t>Is my proxy publishable? A decision framework</a:t>
-            </a:r>
-          </a:p>
-        </p:txBody>
-      </p:sp>
-      <p:sp>
-        <p:nvSpPr>
-          <p:cNvPr id="4" name="Rectangle 3"/>
-          <p:cNvSpPr/>
-          <p:nvPr/>
-        </p:nvSpPr>
-        <p:spPr>
-          <a:xfrm>
-            <a:off x="731520" y="1371600"/>
-            <a:ext cx="10728655" cy="960120"/>
-          </a:xfrm>
-          <a:prstGeom prst="rect">
-            <a:avLst/>
-          </a:prstGeom>
-          <a:solidFill>
-            <a:srgbClr val="F4F8F5"/>
-          </a:solidFill>
-          <a:ln>
-            <a:solidFill>
-              <a:srgbClr val="1B7A43"/>
-            </a:solidFill>
-          </a:ln>
-          <a:effectLst/>
-        </p:spPr>
-        <p:style>
-          <a:lnRef idx="1">
-            <a:schemeClr val="accent1"/>
-          </a:lnRef>
-          <a:fillRef idx="3">
-            <a:schemeClr val="accent1"/>
-          </a:fillRef>
-          <a:effectRef idx="2">
-            <a:schemeClr val="accent1"/>
-          </a:effectRef>
-          <a:fontRef idx="minor">
-            <a:schemeClr val="lt1"/>
-          </a:fontRef>
-        </p:style>
-        <p:txBody>
-          <a:bodyPr rtlCol="0" anchor="ctr" wrap="square"/>
-          <a:lstStyle/>
-          <a:p>
-            <a:pPr algn="ctr"/>
-            <a:r>
-              <a:rPr sz="1200">
-                <a:solidFill>
-                  <a:srgbClr val="33403A"/>
-                </a:solidFill>
-                <a:latin typeface="Segoe UI"/>
-              </a:rPr>
-              <a:t>THE HONEST SENTENCE YOU ARE AIMING FOR — "Night-time radiance at ADM2, VNP46A4 collection 002, lit threshold 0.5 nW·cm⁻²·sr⁻¹,
-correlates with our official electrification rate at r = 0.NN across NN districts
-in 20NN. Suitable for tracking relative change between districts; not suitable for
-estimating connection rates in absolute terms."</a:t>
-            </a:r>
-          </a:p>
-        </p:txBody>
-      </p:sp>
-      <p:sp>
-        <p:nvSpPr>
-          <p:cNvPr id="5" name="TextBox 4"/>
-          <p:cNvSpPr txBox="1"/>
-          <p:nvPr/>
-        </p:nvSpPr>
-        <p:spPr>
-          <a:xfrm>
-            <a:off x="731520" y="2468880"/>
-            <a:ext cx="10728655" cy="640080"/>
-          </a:xfrm>
-          <a:prstGeom prst="rect">
-            <a:avLst/>
-          </a:prstGeom>
-          <a:noFill/>
-        </p:spPr>
-        <p:txBody>
-          <a:bodyPr wrap="square">
-            <a:spAutoFit/>
-          </a:bodyPr>
-          <a:lstStyle/>
-          <a:p>
-            <a:pPr algn="l"/>
-            <a:r>
-              <a:rPr sz="1100" b="0">
-                <a:solidFill>
-                  <a:srgbClr val="6B7B75"/>
-                </a:solidFill>
-                <a:latin typeface="Segoe UI"/>
-              </a:rPr>
-              <a:t>FIGURE — screenshot slide 16 of the HTML deck and paste it here.</a:t>
-            </a:r>
-          </a:p>
-        </p:txBody>
-      </p:sp>
       <p:sp>
         <p:nvSpPr>
           <p:cNvPr id="6" name="TextBox 5"/>
@@ -5373,18 +5066,17 @@
         <p:spPr>
           <a:xfrm>
             <a:off x="0" y="0"/>
-            <a:ext cx="12191695" cy="6858000"/>
+            <a:ext cx="12191695" cy="60000"/>
           </a:xfrm>
           <a:prstGeom prst="rect">
             <a:avLst/>
           </a:prstGeom>
           <a:solidFill>
-            <a:srgbClr val="08090F"/>
+            <a:srgbClr val="F2A900"/>
           </a:solidFill>
           <a:ln>
             <a:noFill/>
           </a:ln>
-          <a:effectLst/>
         </p:spPr>
         <p:style>
           <a:lnRef idx="1">
@@ -5417,7 +5109,7 @@
         <p:spPr>
           <a:xfrm>
             <a:off x="731520" y="502920"/>
-            <a:ext cx="10728655" cy="320040"/>
+            <a:ext cx="10728655" cy="914400"/>
           </a:xfrm>
           <a:prstGeom prst="rect">
             <a:avLst/>
@@ -5432,13 +5124,13 @@
           <a:p>
             <a:pPr algn="l"/>
             <a:r>
-              <a:rPr sz="1100" b="1">
-                <a:solidFill>
-                  <a:srgbClr val="F2A900"/>
-                </a:solidFill>
-                <a:latin typeface="Segoe UI"/>
-              </a:rPr>
-              <a:t>NOW TO THE DATA</a:t>
+              <a:rPr sz="2800" b="1">
+                <a:solidFill>
+                  <a:srgbClr val="0B2545"/>
+                </a:solidFill>
+                <a:latin typeface="Segoe UI"/>
+              </a:rPr>
+              <a:t>What NTL proxies well — and what it does not</a:t>
             </a:r>
           </a:p>
         </p:txBody>
@@ -5451,8 +5143,8 @@
         </p:nvSpPr>
         <p:spPr>
           <a:xfrm>
-            <a:off x="731520" y="914400"/>
-            <a:ext cx="10728655" cy="914400"/>
+            <a:off x="731520" y="1371600"/>
+            <a:ext cx="10728655" cy="4389120"/>
           </a:xfrm>
           <a:prstGeom prst="rect">
             <a:avLst/>
@@ -5465,15 +5157,147 @@
           </a:bodyPr>
           <a:lstStyle/>
           <a:p>
-            <a:pPr algn="l"/>
-            <a:r>
-              <a:rPr sz="2800" b="1">
-                <a:solidFill>
-                  <a:srgbClr val="FFFFFF"/>
-                </a:solidFill>
-                <a:latin typeface="Segoe UI"/>
-              </a:rPr>
-              <a:t>09:30 — Laboratory 1</a:t>
+            <a:pPr>
+              <a:spcAft>
+                <a:spcPts val="700"/>
+              </a:spcAft>
+            </a:pPr>
+            <a:r>
+              <a:rPr sz="1400">
+                <a:solidFill>
+                  <a:srgbClr val="33403A"/>
+                </a:solidFill>
+                <a:latin typeface="Segoe UI"/>
+              </a:rPr>
+              <a:t>•  Electrification progress</a:t>
+            </a:r>
+          </a:p>
+          <a:p>
+            <a:pPr>
+              <a:spcAft>
+                <a:spcPts val="700"/>
+              </a:spcAft>
+            </a:pPr>
+            <a:r>
+              <a:rPr sz="1400">
+                <a:solidFill>
+                  <a:srgbClr val="33403A"/>
+                </a:solidFill>
+                <a:latin typeface="Segoe UI"/>
+              </a:rPr>
+              <a:t>•  Urbanisation and settlement growth</a:t>
+            </a:r>
+          </a:p>
+          <a:p>
+            <a:pPr>
+              <a:spcAft>
+                <a:spcPts val="700"/>
+              </a:spcAft>
+            </a:pPr>
+            <a:r>
+              <a:rPr sz="1400">
+                <a:solidFill>
+                  <a:srgbClr val="33403A"/>
+                </a:solidFill>
+                <a:latin typeface="Segoe UI"/>
+              </a:rPr>
+              <a:t>•  Crisis and conflict impact</a:t>
+            </a:r>
+          </a:p>
+          <a:p>
+            <a:pPr>
+              <a:spcAft>
+                <a:spcPts val="700"/>
+              </a:spcAft>
+            </a:pPr>
+            <a:r>
+              <a:rPr sz="1400">
+                <a:solidFill>
+                  <a:srgbClr val="33403A"/>
+                </a:solidFill>
+                <a:latin typeface="Segoe UI"/>
+              </a:rPr>
+              <a:t>•  Spatial inequality of infrastructure</a:t>
+            </a:r>
+          </a:p>
+          <a:p>
+            <a:pPr>
+              <a:spcAft>
+                <a:spcPts val="700"/>
+              </a:spcAft>
+            </a:pPr>
+            <a:r>
+              <a:rPr sz="1400">
+                <a:solidFill>
+                  <a:srgbClr val="33403A"/>
+                </a:solidFill>
+                <a:latin typeface="Segoe UI"/>
+              </a:rPr>
+              <a:t>•  District comparison  within one year</a:t>
+            </a:r>
+          </a:p>
+          <a:p>
+            <a:pPr>
+              <a:spcAft>
+                <a:spcPts val="700"/>
+              </a:spcAft>
+            </a:pPr>
+            <a:r>
+              <a:rPr sz="1400">
+                <a:solidFill>
+                  <a:srgbClr val="33403A"/>
+                </a:solidFill>
+                <a:latin typeface="Segoe UI"/>
+              </a:rPr>
+              <a:t>•  GDP in levels</a:t>
+            </a:r>
+          </a:p>
+          <a:p>
+            <a:pPr>
+              <a:spcAft>
+                <a:spcPts val="700"/>
+              </a:spcAft>
+            </a:pPr>
+            <a:r>
+              <a:rPr sz="1400">
+                <a:solidFill>
+                  <a:srgbClr val="33403A"/>
+                </a:solidFill>
+                <a:latin typeface="Segoe UI"/>
+              </a:rPr>
+              <a:t>•  Household connection rates</a:t>
+            </a:r>
+          </a:p>
+          <a:p>
+            <a:pPr>
+              <a:spcAft>
+                <a:spcPts val="700"/>
+              </a:spcAft>
+            </a:pPr>
+            <a:r>
+              <a:rPr sz="1400">
+                <a:solidFill>
+                  <a:srgbClr val="33403A"/>
+                </a:solidFill>
+                <a:latin typeface="Segoe UI"/>
+              </a:rPr>
+              <a:t>•  Daytime informal activity</a:t>
+            </a:r>
+          </a:p>
+          <a:p>
+            <a:pPr>
+              <a:spcAft>
+                <a:spcPts val="700"/>
+              </a:spcAft>
+            </a:pPr>
+            <a:r>
+              <a:rPr sz="1400">
+                <a:solidFill>
+                  <a:srgbClr val="33403A"/>
+                </a:solidFill>
+                <a:latin typeface="Segoe UI"/>
+              </a:rPr>
+              <a:t>•  Anything at village scale</a:t>
             </a:r>
           </a:p>
         </p:txBody>
@@ -5481,115 +5305,6 @@
       <p:sp>
         <p:nvSpPr>
           <p:cNvPr id="5" name="TextBox 4"/>
-          <p:cNvSpPr txBox="1"/>
-          <p:nvPr/>
-        </p:nvSpPr>
-        <p:spPr>
-          <a:xfrm>
-            <a:off x="731520" y="1783080"/>
-            <a:ext cx="10728655" cy="548640"/>
-          </a:xfrm>
-          <a:prstGeom prst="rect">
-            <a:avLst/>
-          </a:prstGeom>
-          <a:noFill/>
-        </p:spPr>
-        <p:txBody>
-          <a:bodyPr wrap="square">
-            <a:spAutoFit/>
-          </a:bodyPr>
-          <a:lstStyle/>
-          <a:p>
-            <a:pPr algn="l"/>
-            <a:r>
-              <a:rPr sz="1400" b="0">
-                <a:solidFill>
-                  <a:srgbClr val="DBE7E0"/>
-                </a:solidFill>
-                <a:latin typeface="Segoe UI"/>
-              </a:rPr>
-              <a:t>Collect the granules for your own country, audit their
-completeness, load your boundaries, and clip.</a:t>
-            </a:r>
-          </a:p>
-        </p:txBody>
-      </p:sp>
-      <p:sp>
-        <p:nvSpPr>
-          <p:cNvPr id="6" name="TextBox 5"/>
-          <p:cNvSpPr txBox="1"/>
-          <p:nvPr/>
-        </p:nvSpPr>
-        <p:spPr>
-          <a:xfrm>
-            <a:off x="731520" y="2286000"/>
-            <a:ext cx="10728655" cy="548640"/>
-          </a:xfrm>
-          <a:prstGeom prst="rect">
-            <a:avLst/>
-          </a:prstGeom>
-          <a:noFill/>
-        </p:spPr>
-        <p:txBody>
-          <a:bodyPr wrap="square">
-            <a:spAutoFit/>
-          </a:bodyPr>
-          <a:lstStyle/>
-          <a:p>
-            <a:pPr algn="l"/>
-            <a:r>
-              <a:rPr sz="1400" b="0">
-                <a:solidFill>
-                  <a:srgbClr val="DBE7E0"/>
-                </a:solidFill>
-                <a:latin typeface="Segoe UI"/>
-              </a:rPr>
-              <a:t>Guided track or open track — your choice,
-and you may switch. The deliverable is the same either way.</a:t>
-            </a:r>
-          </a:p>
-        </p:txBody>
-      </p:sp>
-      <p:sp>
-        <p:nvSpPr>
-          <p:cNvPr id="7" name="TextBox 6"/>
-          <p:cNvSpPr txBox="1"/>
-          <p:nvPr/>
-        </p:nvSpPr>
-        <p:spPr>
-          <a:xfrm>
-            <a:off x="731520" y="2788920"/>
-            <a:ext cx="10728655" cy="548640"/>
-          </a:xfrm>
-          <a:prstGeom prst="rect">
-            <a:avLst/>
-          </a:prstGeom>
-          <a:noFill/>
-        </p:spPr>
-        <p:txBody>
-          <a:bodyPr wrap="square">
-            <a:spAutoFit/>
-          </a:bodyPr>
-          <a:lstStyle/>
-          <a:p>
-            <a:pPr algn="l"/>
-            <a:r>
-              <a:rPr sz="1400" b="0">
-                <a:solidFill>
-                  <a:srgbClr val="DBE7E0"/>
-                </a:solidFill>
-                <a:latin typeface="Segoe UI"/>
-              </a:rPr>
-              <a:t>No Earthdata token, no network, or a download that will not finish? 
-Take the Earth Engine variant — it downloads nothing at all. 
-Or set  COUNTRY_ISO3 = "CIV" , the reference country, and carry on.</a:t>
-            </a:r>
-          </a:p>
-        </p:txBody>
-      </p:sp>
-      <p:sp>
-        <p:nvSpPr>
-          <p:cNvPr id="8" name="TextBox 7"/>
           <p:cNvSpPr txBox="1"/>
           <p:nvPr/>
         </p:nvSpPr>
@@ -5713,7 +5428,7 @@
                 </a:solidFill>
                 <a:latin typeface="Segoe UI"/>
               </a:rPr>
-              <a:t>References</a:t>
+              <a:t>What you will have by 17:00</a:t>
             </a:r>
           </a:p>
         </p:txBody>
@@ -5727,7 +5442,7 @@
         <p:spPr>
           <a:xfrm>
             <a:off x="731520" y="1371600"/>
-            <a:ext cx="10728655" cy="548640"/>
+            <a:ext cx="10728655" cy="457200"/>
           </a:xfrm>
           <a:prstGeom prst="rect">
             <a:avLst/>
@@ -5742,210 +5457,70 @@
           <a:p>
             <a:pPr algn="l"/>
             <a:r>
-              <a:rPr sz="1400" b="0">
+              <a:rPr sz="1500" b="1">
+                <a:solidFill>
+                  <a:srgbClr val="1B7A43"/>
+                </a:solidFill>
+                <a:latin typeface="Segoe UI"/>
+              </a:rPr>
+              <a:t>1  Clipped national raster</a:t>
+            </a:r>
+          </a:p>
+        </p:txBody>
+      </p:sp>
+      <p:sp>
+        <p:nvSpPr>
+          <p:cNvPr id="5" name="Rectangle 4"/>
+          <p:cNvSpPr/>
+          <p:nvPr/>
+        </p:nvSpPr>
+        <p:spPr>
+          <a:xfrm>
+            <a:off x="731520" y="1920240"/>
+            <a:ext cx="10728655" cy="960120"/>
+          </a:xfrm>
+          <a:prstGeom prst="rect">
+            <a:avLst/>
+          </a:prstGeom>
+          <a:solidFill>
+            <a:srgbClr val="F4F8F5"/>
+          </a:solidFill>
+          <a:ln>
+            <a:solidFill>
+              <a:srgbClr val="1B7A43"/>
+            </a:solidFill>
+          </a:ln>
+          <a:effectLst/>
+        </p:spPr>
+        <p:style>
+          <a:lnRef idx="1">
+            <a:schemeClr val="accent1"/>
+          </a:lnRef>
+          <a:fillRef idx="3">
+            <a:schemeClr val="accent1"/>
+          </a:fillRef>
+          <a:effectRef idx="2">
+            <a:schemeClr val="accent1"/>
+          </a:effectRef>
+          <a:fontRef idx="minor">
+            <a:schemeClr val="lt1"/>
+          </a:fontRef>
+        </p:style>
+        <p:txBody>
+          <a:bodyPr rtlCol="0" anchor="ctr" wrap="square"/>
+          <a:lstStyle/>
+          <a:p>
+            <a:pPr algn="ctr"/>
+            <a:r>
+              <a:rPr sz="1200">
                 <a:solidFill>
                   <a:srgbClr val="33403A"/>
                 </a:solidFill>
                 <a:latin typeface="Segoe UI"/>
               </a:rPr>
-              <a:t>Every claim in this deck traces to one of these. DOIs resolve at
- doi.org/&lt;doi&gt; .</a:t>
-            </a:r>
-          </a:p>
-        </p:txBody>
-      </p:sp>
-      <p:sp>
-        <p:nvSpPr>
-          <p:cNvPr id="5" name="TextBox 4"/>
-          <p:cNvSpPr txBox="1"/>
-          <p:nvPr/>
-        </p:nvSpPr>
-        <p:spPr>
-          <a:xfrm>
-            <a:off x="731520" y="1874520"/>
-            <a:ext cx="10728655" cy="3886200"/>
-          </a:xfrm>
-          <a:prstGeom prst="rect">
-            <a:avLst/>
-          </a:prstGeom>
-          <a:noFill/>
-        </p:spPr>
-        <p:txBody>
-          <a:bodyPr wrap="square">
-            <a:spAutoFit/>
-          </a:bodyPr>
-          <a:lstStyle/>
-          <a:p>
-            <a:pPr>
-              <a:spcAft>
-                <a:spcPts val="700"/>
-              </a:spcAft>
-            </a:pPr>
-            <a:r>
-              <a:rPr sz="1400">
-                <a:solidFill>
-                  <a:srgbClr val="33403A"/>
-                </a:solidFill>
-                <a:latin typeface="Segoe UI"/>
-              </a:rPr>
-              <a:t>•  Román, M.O., et al.  (2018). NASA's Black Marble nighttime lights product
-suite.  Remote Sensing of Environment , 210, 113–143.
- 10.1016/j.rse.2018.03.017  
- The VNP46 product suite — read this before using VNP46A2/A3/A4.</a:t>
-            </a:r>
-          </a:p>
-          <a:p>
-            <a:pPr>
-              <a:spcAft>
-                <a:spcPts val="700"/>
-              </a:spcAft>
-            </a:pPr>
-            <a:r>
-              <a:rPr sz="1400">
-                <a:solidFill>
-                  <a:srgbClr val="33403A"/>
-                </a:solidFill>
-                <a:latin typeface="Segoe UI"/>
-              </a:rPr>
-              <a:t>•  Elvidge, C.D., Zhizhin, M., Ghosh, T., Hsu, F.-C., Taneja, J.  (2021).
-Annual Time Series of Global VIIRS Nighttime Lights Derived from Monthly Averages:
-2012 to 2019.  Remote Sensing , 13(5), 922.
- 10.3390/rs13050922  
- The EOG annual VNL v2 series — the product behind the Earth Engine variant.</a:t>
-            </a:r>
-          </a:p>
-          <a:p>
-            <a:pPr>
-              <a:spcAft>
-                <a:spcPts val="700"/>
-              </a:spcAft>
-            </a:pPr>
-            <a:r>
-              <a:rPr sz="1400">
-                <a:solidFill>
-                  <a:srgbClr val="33403A"/>
-                </a:solidFill>
-                <a:latin typeface="Segoe UI"/>
-              </a:rPr>
-              <a:t>•  Levin, N., et al.  (2020). Remote sensing of night lights: A review and an
-outlook for the future.  Remote Sensing of Environment , 237, 111443.
- 10.1016/j.rse.2019.111443  
- The single best starting point if you read only one paper.</a:t>
-            </a:r>
-          </a:p>
-          <a:p>
-            <a:pPr>
-              <a:spcAft>
-                <a:spcPts val="700"/>
-              </a:spcAft>
-            </a:pPr>
-            <a:r>
-              <a:rPr sz="1400">
-                <a:solidFill>
-                  <a:srgbClr val="33403A"/>
-                </a:solidFill>
-                <a:latin typeface="Segoe UI"/>
-              </a:rPr>
-              <a:t>•  Henderson, J.V., Storeygard, A., Weil, D.N.  (2012). Measuring Economic
-Growth from Outer Space.  American Economic Review , 102(2), 994–1028.
- 10.1257/aer.102.2.994  
- The foundational case for lights as a complement to weak national accounts.</a:t>
-            </a:r>
-          </a:p>
-          <a:p>
-            <a:pPr>
-              <a:spcAft>
-                <a:spcPts val="700"/>
-              </a:spcAft>
-            </a:pPr>
-            <a:r>
-              <a:rPr sz="1400">
-                <a:solidFill>
-                  <a:srgbClr val="33403A"/>
-                </a:solidFill>
-                <a:latin typeface="Segoe UI"/>
-              </a:rPr>
-              <a:t>•  Gibson, J., Olivia, S., Boe-Gibson, G.  (2020). Night Lights in Economics:
-Sources and Uses.  Journal of Economic Surveys , 34(5), 955–980. 
- A critical review. Read it alongside Henderson et al., not instead of it.</a:t>
-            </a:r>
-          </a:p>
-          <a:p>
-            <a:pPr>
-              <a:spcAft>
-                <a:spcPts val="700"/>
-              </a:spcAft>
-            </a:pPr>
-            <a:r>
-              <a:rPr sz="1400">
-                <a:solidFill>
-                  <a:srgbClr val="33403A"/>
-                </a:solidFill>
-                <a:latin typeface="Segoe UI"/>
-              </a:rPr>
-              <a:t>•  Gibson, J., Olivia, S., Boe-Gibson, G., Li, C.  (2021). Which night lights
-data should we use in economics, and where?  Journal of Development Economics ,
-149, 102602.  10.1016/j.jdeveco.2020.102602  
- Why naming your product and version is not pedantry.</a:t>
-            </a:r>
-          </a:p>
-          <a:p>
-            <a:pPr>
-              <a:spcAft>
-                <a:spcPts val="700"/>
-              </a:spcAft>
-            </a:pPr>
-            <a:r>
-              <a:rPr sz="1400">
-                <a:solidFill>
-                  <a:srgbClr val="33403A"/>
-                </a:solidFill>
-                <a:latin typeface="Segoe UI"/>
-              </a:rPr>
-              <a:t>•  Bluhm, R., Krause, M.  (2022). Top lights: Bright cities and their
-contribution to economic development.  Journal of Development Economics , 157,
-102880.  10.1016/j.jdeveco.2022.102880  
- Saturation correction reverses the Sub-Saharan primary/secondary city finding.</a:t>
-            </a:r>
-          </a:p>
-          <a:p>
-            <a:pPr>
-              <a:spcAft>
-                <a:spcPts val="700"/>
-              </a:spcAft>
-            </a:pPr>
-            <a:r>
-              <a:rPr sz="1400">
-                <a:solidFill>
-                  <a:srgbClr val="33403A"/>
-                </a:solidFill>
-                <a:latin typeface="Segoe UI"/>
-              </a:rPr>
-              <a:t>•  Min, B., Gaba, K.M., Sarr, O.F., Agalassou, A.  (2013). Detection of rural
-electrification in Africa using DMSP-OLS night lights imagery.  International
-Journal of Remote Sensing , 34(22), 8118–8141.
- 10.1080/01431161.2013.833358  
- Senegal and Mali, validated against ground records. The African reference.</a:t>
-            </a:r>
-          </a:p>
-          <a:p>
-            <a:pPr>
-              <a:spcAft>
-                <a:spcPts val="700"/>
-              </a:spcAft>
-            </a:pPr>
-            <a:r>
-              <a:rPr sz="1400">
-                <a:solidFill>
-                  <a:srgbClr val="33403A"/>
-                </a:solidFill>
-                <a:latin typeface="Segoe UI"/>
-              </a:rPr>
-              <a:t>•  Elvidge, C.D., Zhizhin, M., Baugh, K., Hsu, F.-C., Ghosh, T.  (2016).
-Methods for Global Survey of Natural Gas Flaring from Visible Infrared Imaging
-Radiometer Suite Data.  Energies , 9(1), 14.
- 10.3390/en9010014  
- How flares are detected — and therefore how to mask them out of your totals.</a:t>
+              <a:t>ONE VARIABLE DRIVES ALL OF IT — COUNTRY_ISO3 = "CIV"  
+Boundaries, satellite tiles, projection, map extent and every figure title follow
+from it — for all 55 African Union member states.</a:t>
             </a:r>
           </a:p>
         </p:txBody>
@@ -6012,18 +5587,17 @@
         <p:spPr>
           <a:xfrm>
             <a:off x="0" y="0"/>
-            <a:ext cx="12191695" cy="6858000"/>
+            <a:ext cx="12191695" cy="60000"/>
           </a:xfrm>
           <a:prstGeom prst="rect">
             <a:avLst/>
           </a:prstGeom>
           <a:solidFill>
-            <a:srgbClr val="0B2545"/>
+            <a:srgbClr val="F2A900"/>
           </a:solidFill>
           <a:ln>
             <a:noFill/>
           </a:ln>
-          <a:effectLst/>
         </p:spPr>
         <p:style>
           <a:lnRef idx="1">
@@ -6055,8 +5629,8 @@
         </p:nvSpPr>
         <p:spPr>
           <a:xfrm>
-            <a:off x="1097280" y="2377440"/>
-            <a:ext cx="9997135" cy="2286000"/>
+            <a:off x="731520" y="502920"/>
+            <a:ext cx="10728655" cy="914400"/>
           </a:xfrm>
           <a:prstGeom prst="rect">
             <a:avLst/>
@@ -6069,18 +5643,143 @@
           </a:bodyPr>
           <a:lstStyle/>
           <a:p>
+            <a:pPr algn="l"/>
+            <a:r>
+              <a:rPr sz="2800" b="1">
+                <a:solidFill>
+                  <a:srgbClr val="0B2545"/>
+                </a:solidFill>
+                <a:latin typeface="Segoe UI"/>
+              </a:rPr>
+              <a:t>Is my proxy publishable? A decision framework</a:t>
+            </a:r>
+          </a:p>
+        </p:txBody>
+      </p:sp>
+      <p:sp>
+        <p:nvSpPr>
+          <p:cNvPr id="4" name="Rectangle 3"/>
+          <p:cNvSpPr/>
+          <p:nvPr/>
+        </p:nvSpPr>
+        <p:spPr>
+          <a:xfrm>
+            <a:off x="731520" y="1371600"/>
+            <a:ext cx="10728655" cy="960120"/>
+          </a:xfrm>
+          <a:prstGeom prst="rect">
+            <a:avLst/>
+          </a:prstGeom>
+          <a:solidFill>
+            <a:srgbClr val="F4F8F5"/>
+          </a:solidFill>
+          <a:ln>
+            <a:solidFill>
+              <a:srgbClr val="1B7A43"/>
+            </a:solidFill>
+          </a:ln>
+          <a:effectLst/>
+        </p:spPr>
+        <p:style>
+          <a:lnRef idx="1">
+            <a:schemeClr val="accent1"/>
+          </a:lnRef>
+          <a:fillRef idx="3">
+            <a:schemeClr val="accent1"/>
+          </a:fillRef>
+          <a:effectRef idx="2">
+            <a:schemeClr val="accent1"/>
+          </a:effectRef>
+          <a:fontRef idx="minor">
+            <a:schemeClr val="lt1"/>
+          </a:fontRef>
+        </p:style>
+        <p:txBody>
+          <a:bodyPr rtlCol="0" anchor="ctr" wrap="square"/>
+          <a:lstStyle/>
+          <a:p>
             <a:pPr algn="ctr"/>
             <a:r>
-              <a:rPr sz="1400" b="0">
-                <a:solidFill>
-                  <a:srgbClr val="DBE7E0"/>
-                </a:solidFill>
-                <a:latin typeface="Segoe UI"/>
-              </a:rPr>
-              <a:t>This PowerPoint file is generated from the reveal.js deck at
-slides/decks/08-ntl-what-darkness-tells-us.deck.html
-Edits made here do not flow back. If your change should be permanent,
-edit the deck source and run:  python tools/build_slides.py &amp;&amp; python tools/build_pptx.py</a:t>
+              <a:rPr sz="1200">
+                <a:solidFill>
+                  <a:srgbClr val="33403A"/>
+                </a:solidFill>
+                <a:latin typeface="Segoe UI"/>
+              </a:rPr>
+              <a:t>THE HONEST SENTENCE YOU ARE AIMING FOR — "Night-time radiance at ADM2, VNP46A4 collection 002, lit threshold 0.5 nW·cm⁻²·sr⁻¹,
+correlates with our official electrification rate at r = 0.NN across NN districts
+in 20NN. Suitable for tracking relative change between districts; not suitable for
+estimating connection rates in absolute terms."</a:t>
+            </a:r>
+          </a:p>
+        </p:txBody>
+      </p:sp>
+      <p:sp>
+        <p:nvSpPr>
+          <p:cNvPr id="5" name="TextBox 4"/>
+          <p:cNvSpPr txBox="1"/>
+          <p:nvPr/>
+        </p:nvSpPr>
+        <p:spPr>
+          <a:xfrm>
+            <a:off x="731520" y="2468880"/>
+            <a:ext cx="10728655" cy="640080"/>
+          </a:xfrm>
+          <a:prstGeom prst="rect">
+            <a:avLst/>
+          </a:prstGeom>
+          <a:noFill/>
+        </p:spPr>
+        <p:txBody>
+          <a:bodyPr wrap="square">
+            <a:spAutoFit/>
+          </a:bodyPr>
+          <a:lstStyle/>
+          <a:p>
+            <a:pPr algn="l"/>
+            <a:r>
+              <a:rPr sz="1100" b="0">
+                <a:solidFill>
+                  <a:srgbClr val="6B7B75"/>
+                </a:solidFill>
+                <a:latin typeface="Segoe UI"/>
+              </a:rPr>
+              <a:t>FIGURE — screenshot slide 19 of the HTML deck and paste it here.</a:t>
+            </a:r>
+          </a:p>
+        </p:txBody>
+      </p:sp>
+      <p:sp>
+        <p:nvSpPr>
+          <p:cNvPr id="6" name="TextBox 5"/>
+          <p:cNvSpPr txBox="1"/>
+          <p:nvPr/>
+        </p:nvSpPr>
+        <p:spPr>
+          <a:xfrm>
+            <a:off x="731520" y="6400800"/>
+            <a:ext cx="10728655" cy="274320"/>
+          </a:xfrm>
+          <a:prstGeom prst="rect">
+            <a:avLst/>
+          </a:prstGeom>
+          <a:noFill/>
+        </p:spPr>
+        <p:txBody>
+          <a:bodyPr wrap="square">
+            <a:spAutoFit/>
+          </a:bodyPr>
+          <a:lstStyle/>
+          <a:p>
+            <a:pPr algn="l"/>
+            <a:r>
+              <a:rPr sz="900" b="0">
+                <a:solidFill>
+                  <a:srgbClr val="6B7B75"/>
+                </a:solidFill>
+                <a:latin typeface="Segoe UI"/>
+              </a:rPr>
+              <a:t>African Development Bank · AU STATAFRIC · STG17</a:t>
             </a:r>
           </a:p>
         </p:txBody>
@@ -6176,7 +5875,7 @@
                 </a:solidFill>
                 <a:latin typeface="Segoe UI"/>
               </a:rPr>
-              <a:t>Why a statistical office should care</a:t>
+              <a:t>The gap this day is about</a:t>
             </a:r>
           </a:p>
         </p:txBody>
@@ -6211,8 +5910,8 @@
                 </a:solidFill>
                 <a:latin typeface="Segoe UI"/>
               </a:rPr>
-              <a:t>Between two censuses, most African statistical offices have no  subnational ,
- annual ,  comparable  measure of economic activity.</a:t>
+              <a:t>Night-time lights do not fill that gap. But they are the only free, continental,
+district-level signal that updates every year.</a:t>
             </a:r>
           </a:p>
         </p:txBody>
@@ -6226,7 +5925,7 @@
         <p:spPr>
           <a:xfrm>
             <a:off x="731520" y="1874520"/>
-            <a:ext cx="10728655" cy="548640"/>
+            <a:ext cx="10728655" cy="457200"/>
           </a:xfrm>
           <a:prstGeom prst="rect">
             <a:avLst/>
@@ -6241,13 +5940,13 @@
           <a:p>
             <a:pPr algn="l"/>
             <a:r>
-              <a:rPr sz="1400" b="0">
-                <a:solidFill>
-                  <a:srgbClr val="33403A"/>
-                </a:solidFill>
-                <a:latin typeface="Segoe UI"/>
-              </a:rPr>
-              <a:t>Night-time lights are none of these things by nature. But they are:</a:t>
+              <a:rPr sz="1500" b="1">
+                <a:solidFill>
+                  <a:srgbClr val="1B7A43"/>
+                </a:solidFill>
+                <a:latin typeface="Segoe UI"/>
+              </a:rPr>
+              <a:t>2012→  Continuous VIIRS record</a:t>
             </a:r>
           </a:p>
         </p:txBody>
@@ -6260,8 +5959,8 @@
         </p:nvSpPr>
         <p:spPr>
           <a:xfrm>
-            <a:off x="731520" y="2377440"/>
-            <a:ext cx="10728655" cy="457200"/>
+            <a:off x="731520" y="6400800"/>
+            <a:ext cx="10728655" cy="274320"/>
           </a:xfrm>
           <a:prstGeom prst="rect">
             <a:avLst/>
@@ -6276,13 +5975,217 @@
           <a:p>
             <a:pPr algn="l"/>
             <a:r>
-              <a:rPr sz="1500" b="1">
-                <a:solidFill>
-                  <a:srgbClr val="1B7A43"/>
-                </a:solidFill>
-                <a:latin typeface="Segoe UI"/>
-              </a:rPr>
-              <a:t>2012→  VIIRS continuous record</a:t>
+              <a:rPr sz="900" b="0">
+                <a:solidFill>
+                  <a:srgbClr val="6B7B75"/>
+                </a:solidFill>
+                <a:latin typeface="Segoe UI"/>
+              </a:rPr>
+              <a:t>African Development Bank · AU STATAFRIC · STG17</a:t>
+            </a:r>
+          </a:p>
+        </p:txBody>
+      </p:sp>
+    </p:spTree>
+  </p:cSld>
+  <p:clrMapOvr>
+    <a:masterClrMapping/>
+  </p:clrMapOvr>
+</p:sld>
+</file>
+
+<file path=ppt/slides/slide20.xml><?xml version="1.0" encoding="utf-8"?>
+<p:sld xmlns:a="http://schemas.openxmlformats.org/drawingml/2006/main" xmlns:p="http://schemas.openxmlformats.org/presentationml/2006/main" xmlns:r="http://schemas.openxmlformats.org/officeDocument/2006/relationships">
+  <p:cSld>
+    <p:spTree>
+      <p:nvGrpSpPr>
+        <p:cNvPr id="1" name=""/>
+        <p:cNvGrpSpPr/>
+        <p:nvPr/>
+      </p:nvGrpSpPr>
+      <p:grpSpPr/>
+      <p:sp>
+        <p:nvSpPr>
+          <p:cNvPr id="2" name="Rectangle 1"/>
+          <p:cNvSpPr/>
+          <p:nvPr/>
+        </p:nvSpPr>
+        <p:spPr>
+          <a:xfrm>
+            <a:off x="0" y="0"/>
+            <a:ext cx="12191695" cy="6858000"/>
+          </a:xfrm>
+          <a:prstGeom prst="rect">
+            <a:avLst/>
+          </a:prstGeom>
+          <a:solidFill>
+            <a:srgbClr val="08090F"/>
+          </a:solidFill>
+          <a:ln>
+            <a:noFill/>
+          </a:ln>
+          <a:effectLst/>
+        </p:spPr>
+        <p:style>
+          <a:lnRef idx="1">
+            <a:schemeClr val="accent1"/>
+          </a:lnRef>
+          <a:fillRef idx="3">
+            <a:schemeClr val="accent1"/>
+          </a:fillRef>
+          <a:effectRef idx="2">
+            <a:schemeClr val="accent1"/>
+          </a:effectRef>
+          <a:fontRef idx="minor">
+            <a:schemeClr val="lt1"/>
+          </a:fontRef>
+        </p:style>
+        <p:txBody>
+          <a:bodyPr rtlCol="0" anchor="ctr"/>
+          <a:lstStyle/>
+          <a:p>
+            <a:pPr algn="ctr"/>
+          </a:p>
+        </p:txBody>
+      </p:sp>
+      <p:sp>
+        <p:nvSpPr>
+          <p:cNvPr id="3" name="TextBox 2"/>
+          <p:cNvSpPr txBox="1"/>
+          <p:nvPr/>
+        </p:nvSpPr>
+        <p:spPr>
+          <a:xfrm>
+            <a:off x="731520" y="502920"/>
+            <a:ext cx="10728655" cy="320040"/>
+          </a:xfrm>
+          <a:prstGeom prst="rect">
+            <a:avLst/>
+          </a:prstGeom>
+          <a:noFill/>
+        </p:spPr>
+        <p:txBody>
+          <a:bodyPr wrap="square">
+            <a:spAutoFit/>
+          </a:bodyPr>
+          <a:lstStyle/>
+          <a:p>
+            <a:pPr algn="l"/>
+            <a:r>
+              <a:rPr sz="1100" b="1">
+                <a:solidFill>
+                  <a:srgbClr val="F2A900"/>
+                </a:solidFill>
+                <a:latin typeface="Segoe UI"/>
+              </a:rPr>
+              <a:t>NOW TO THE DATA</a:t>
+            </a:r>
+          </a:p>
+        </p:txBody>
+      </p:sp>
+      <p:sp>
+        <p:nvSpPr>
+          <p:cNvPr id="4" name="TextBox 3"/>
+          <p:cNvSpPr txBox="1"/>
+          <p:nvPr/>
+        </p:nvSpPr>
+        <p:spPr>
+          <a:xfrm>
+            <a:off x="731520" y="914400"/>
+            <a:ext cx="10728655" cy="914400"/>
+          </a:xfrm>
+          <a:prstGeom prst="rect">
+            <a:avLst/>
+          </a:prstGeom>
+          <a:noFill/>
+        </p:spPr>
+        <p:txBody>
+          <a:bodyPr wrap="square">
+            <a:spAutoFit/>
+          </a:bodyPr>
+          <a:lstStyle/>
+          <a:p>
+            <a:pPr algn="l"/>
+            <a:r>
+              <a:rPr sz="2800" b="1">
+                <a:solidFill>
+                  <a:srgbClr val="FFFFFF"/>
+                </a:solidFill>
+                <a:latin typeface="Segoe UI"/>
+              </a:rPr>
+              <a:t>09:30 — Laboratory 1</a:t>
+            </a:r>
+          </a:p>
+        </p:txBody>
+      </p:sp>
+      <p:sp>
+        <p:nvSpPr>
+          <p:cNvPr id="5" name="TextBox 4"/>
+          <p:cNvSpPr txBox="1"/>
+          <p:nvPr/>
+        </p:nvSpPr>
+        <p:spPr>
+          <a:xfrm>
+            <a:off x="731520" y="1783080"/>
+            <a:ext cx="10728655" cy="548640"/>
+          </a:xfrm>
+          <a:prstGeom prst="rect">
+            <a:avLst/>
+          </a:prstGeom>
+          <a:noFill/>
+        </p:spPr>
+        <p:txBody>
+          <a:bodyPr wrap="square">
+            <a:spAutoFit/>
+          </a:bodyPr>
+          <a:lstStyle/>
+          <a:p>
+            <a:pPr algn="l"/>
+            <a:r>
+              <a:rPr sz="1400" b="0">
+                <a:solidFill>
+                  <a:srgbClr val="DBE7E0"/>
+                </a:solidFill>
+                <a:latin typeface="Segoe UI"/>
+              </a:rPr>
+              <a:t>Collect the granules for your own country, audit their
+completeness, load your boundaries, and clip.</a:t>
+            </a:r>
+          </a:p>
+        </p:txBody>
+      </p:sp>
+      <p:sp>
+        <p:nvSpPr>
+          <p:cNvPr id="6" name="TextBox 5"/>
+          <p:cNvSpPr txBox="1"/>
+          <p:nvPr/>
+        </p:nvSpPr>
+        <p:spPr>
+          <a:xfrm>
+            <a:off x="731520" y="2286000"/>
+            <a:ext cx="10728655" cy="548640"/>
+          </a:xfrm>
+          <a:prstGeom prst="rect">
+            <a:avLst/>
+          </a:prstGeom>
+          <a:noFill/>
+        </p:spPr>
+        <p:txBody>
+          <a:bodyPr wrap="square">
+            <a:spAutoFit/>
+          </a:bodyPr>
+          <a:lstStyle/>
+          <a:p>
+            <a:pPr algn="l"/>
+            <a:r>
+              <a:rPr sz="1400" b="0">
+                <a:solidFill>
+                  <a:srgbClr val="DBE7E0"/>
+                </a:solidFill>
+                <a:latin typeface="Segoe UI"/>
+              </a:rPr>
+              <a:t>Guided track or open track — your choice,
+and you may switch. The deliverable is the same either way.</a:t>
             </a:r>
           </a:p>
         </p:txBody>
@@ -6295,8 +6198,212 @@
         </p:nvSpPr>
         <p:spPr>
           <a:xfrm>
-            <a:off x="731520" y="2926080"/>
-            <a:ext cx="10728655" cy="2834640"/>
+            <a:off x="731520" y="2788920"/>
+            <a:ext cx="10728655" cy="548640"/>
+          </a:xfrm>
+          <a:prstGeom prst="rect">
+            <a:avLst/>
+          </a:prstGeom>
+          <a:noFill/>
+        </p:spPr>
+        <p:txBody>
+          <a:bodyPr wrap="square">
+            <a:spAutoFit/>
+          </a:bodyPr>
+          <a:lstStyle/>
+          <a:p>
+            <a:pPr algn="l"/>
+            <a:r>
+              <a:rPr sz="1400" b="0">
+                <a:solidFill>
+                  <a:srgbClr val="DBE7E0"/>
+                </a:solidFill>
+                <a:latin typeface="Segoe UI"/>
+              </a:rPr>
+              <a:t>No Earthdata token, no network, or a download that will not finish? 
+Take the Earth Engine variant — it downloads nothing at all. 
+Or set  COUNTRY_ISO3 = "CIV" , the reference country, and carry on.</a:t>
+            </a:r>
+          </a:p>
+        </p:txBody>
+      </p:sp>
+      <p:sp>
+        <p:nvSpPr>
+          <p:cNvPr id="8" name="TextBox 7"/>
+          <p:cNvSpPr txBox="1"/>
+          <p:nvPr/>
+        </p:nvSpPr>
+        <p:spPr>
+          <a:xfrm>
+            <a:off x="731520" y="6400800"/>
+            <a:ext cx="10728655" cy="274320"/>
+          </a:xfrm>
+          <a:prstGeom prst="rect">
+            <a:avLst/>
+          </a:prstGeom>
+          <a:noFill/>
+        </p:spPr>
+        <p:txBody>
+          <a:bodyPr wrap="square">
+            <a:spAutoFit/>
+          </a:bodyPr>
+          <a:lstStyle/>
+          <a:p>
+            <a:pPr algn="l"/>
+            <a:r>
+              <a:rPr sz="900" b="0">
+                <a:solidFill>
+                  <a:srgbClr val="6B7B75"/>
+                </a:solidFill>
+                <a:latin typeface="Segoe UI"/>
+              </a:rPr>
+              <a:t>African Development Bank · AU STATAFRIC · STG17</a:t>
+            </a:r>
+          </a:p>
+        </p:txBody>
+      </p:sp>
+    </p:spTree>
+  </p:cSld>
+  <p:clrMapOvr>
+    <a:masterClrMapping/>
+  </p:clrMapOvr>
+</p:sld>
+</file>
+
+<file path=ppt/slides/slide21.xml><?xml version="1.0" encoding="utf-8"?>
+<p:sld xmlns:a="http://schemas.openxmlformats.org/drawingml/2006/main" xmlns:p="http://schemas.openxmlformats.org/presentationml/2006/main" xmlns:r="http://schemas.openxmlformats.org/officeDocument/2006/relationships">
+  <p:cSld>
+    <p:spTree>
+      <p:nvGrpSpPr>
+        <p:cNvPr id="1" name=""/>
+        <p:cNvGrpSpPr/>
+        <p:nvPr/>
+      </p:nvGrpSpPr>
+      <p:grpSpPr/>
+      <p:sp>
+        <p:nvSpPr>
+          <p:cNvPr id="2" name="Rectangle 1"/>
+          <p:cNvSpPr/>
+          <p:nvPr/>
+        </p:nvSpPr>
+        <p:spPr>
+          <a:xfrm>
+            <a:off x="0" y="0"/>
+            <a:ext cx="12191695" cy="60000"/>
+          </a:xfrm>
+          <a:prstGeom prst="rect">
+            <a:avLst/>
+          </a:prstGeom>
+          <a:solidFill>
+            <a:srgbClr val="F2A900"/>
+          </a:solidFill>
+          <a:ln>
+            <a:noFill/>
+          </a:ln>
+        </p:spPr>
+        <p:style>
+          <a:lnRef idx="1">
+            <a:schemeClr val="accent1"/>
+          </a:lnRef>
+          <a:fillRef idx="3">
+            <a:schemeClr val="accent1"/>
+          </a:fillRef>
+          <a:effectRef idx="2">
+            <a:schemeClr val="accent1"/>
+          </a:effectRef>
+          <a:fontRef idx="minor">
+            <a:schemeClr val="lt1"/>
+          </a:fontRef>
+        </p:style>
+        <p:txBody>
+          <a:bodyPr rtlCol="0" anchor="ctr"/>
+          <a:lstStyle/>
+          <a:p>
+            <a:pPr algn="ctr"/>
+          </a:p>
+        </p:txBody>
+      </p:sp>
+      <p:sp>
+        <p:nvSpPr>
+          <p:cNvPr id="3" name="TextBox 2"/>
+          <p:cNvSpPr txBox="1"/>
+          <p:nvPr/>
+        </p:nvSpPr>
+        <p:spPr>
+          <a:xfrm>
+            <a:off x="731520" y="502920"/>
+            <a:ext cx="10728655" cy="914400"/>
+          </a:xfrm>
+          <a:prstGeom prst="rect">
+            <a:avLst/>
+          </a:prstGeom>
+          <a:noFill/>
+        </p:spPr>
+        <p:txBody>
+          <a:bodyPr wrap="square">
+            <a:spAutoFit/>
+          </a:bodyPr>
+          <a:lstStyle/>
+          <a:p>
+            <a:pPr algn="l"/>
+            <a:r>
+              <a:rPr sz="2800" b="1">
+                <a:solidFill>
+                  <a:srgbClr val="0B2545"/>
+                </a:solidFill>
+                <a:latin typeface="Segoe UI"/>
+              </a:rPr>
+              <a:t>References</a:t>
+            </a:r>
+          </a:p>
+        </p:txBody>
+      </p:sp>
+      <p:sp>
+        <p:nvSpPr>
+          <p:cNvPr id="4" name="TextBox 3"/>
+          <p:cNvSpPr txBox="1"/>
+          <p:nvPr/>
+        </p:nvSpPr>
+        <p:spPr>
+          <a:xfrm>
+            <a:off x="731520" y="1371600"/>
+            <a:ext cx="10728655" cy="548640"/>
+          </a:xfrm>
+          <a:prstGeom prst="rect">
+            <a:avLst/>
+          </a:prstGeom>
+          <a:noFill/>
+        </p:spPr>
+        <p:txBody>
+          <a:bodyPr wrap="square">
+            <a:spAutoFit/>
+          </a:bodyPr>
+          <a:lstStyle/>
+          <a:p>
+            <a:pPr algn="l"/>
+            <a:r>
+              <a:rPr sz="1400" b="0">
+                <a:solidFill>
+                  <a:srgbClr val="33403A"/>
+                </a:solidFill>
+                <a:latin typeface="Segoe UI"/>
+              </a:rPr>
+              <a:t>Every claim in this deck traces to one of these. DOIs resolve at
+ doi.org/&lt;doi&gt; .</a:t>
+            </a:r>
+          </a:p>
+        </p:txBody>
+      </p:sp>
+      <p:sp>
+        <p:nvSpPr>
+          <p:cNvPr id="5" name="TextBox 4"/>
+          <p:cNvSpPr txBox="1"/>
+          <p:nvPr/>
+        </p:nvSpPr>
+        <p:spPr>
+          <a:xfrm>
+            <a:off x="731520" y="1874520"/>
+            <a:ext cx="10728655" cy="3886200"/>
           </a:xfrm>
           <a:prstGeom prst="rect">
             <a:avLst/>
@@ -6321,7 +6428,10 @@
                 </a:solidFill>
                 <a:latin typeface="Segoe UI"/>
               </a:rPr>
-              <a:t>•  Available  — every night, since 2012, free</a:t>
+              <a:t>•  Román, M.O., et al.  (2018). NASA's Black Marble nighttime lights product
+suite.  Remote Sensing of Environment , 210, 113–143.
+ 10.1016/j.rse.2018.03.017  
+ The VNP46 product suite — read this before using VNP46A2/A3/A4.</a:t>
             </a:r>
           </a:p>
           <a:p>
@@ -6337,7 +6447,11 @@
                 </a:solidFill>
                 <a:latin typeface="Segoe UI"/>
               </a:rPr>
-              <a:t>•  Consistent  — the same sensor over the whole continent</a:t>
+              <a:t>•  Elvidge, C.D., Zhizhin, M., Ghosh, T., Hsu, F.-C., Taneja, J.  (2021).
+Annual Time Series of Global VIIRS Nighttime Lights Derived from Monthly Averages:
+2012 to 2019.  Remote Sensing , 13(5), 922.
+ 10.3390/rs13050922  
+ The EOG annual VNL v2 series — the product behind the Earth Engine variant.</a:t>
             </a:r>
           </a:p>
           <a:p>
@@ -6353,7 +6467,10 @@
                 </a:solidFill>
                 <a:latin typeface="Segoe UI"/>
               </a:rPr>
-              <a:t>•  Fine-grained  — about 500 m, so district-level is possible</a:t>
+              <a:t>•  Levin, N., et al.  (2020). Remote sensing of night lights: A review and an
+outlook for the future.  Remote Sensing of Environment , 237, 111443.
+ 10.1016/j.rse.2019.111443  
+ The single best starting point if you read only one paper.</a:t>
             </a:r>
           </a:p>
           <a:p>
@@ -6369,32 +6486,182 @@
                 </a:solidFill>
                 <a:latin typeface="Segoe UI"/>
               </a:rPr>
-              <a:t>•  Independent  — not derived from the statistics you are trying to check</a:t>
-            </a:r>
-          </a:p>
-        </p:txBody>
-      </p:sp>
-      <p:sp>
-        <p:nvSpPr>
-          <p:cNvPr id="8" name="Rectangle 7"/>
+              <a:t>•  Henderson, J.V., Storeygard, A., Weil, D.N.  (2012). Measuring Economic
+Growth from Outer Space.  American Economic Review , 102(2), 994–1028.
+ 10.1257/aer.102.2.994  
+ The foundational case for lights as a complement to weak national accounts.</a:t>
+            </a:r>
+          </a:p>
+          <a:p>
+            <a:pPr>
+              <a:spcAft>
+                <a:spcPts val="700"/>
+              </a:spcAft>
+            </a:pPr>
+            <a:r>
+              <a:rPr sz="1400">
+                <a:solidFill>
+                  <a:srgbClr val="33403A"/>
+                </a:solidFill>
+                <a:latin typeface="Segoe UI"/>
+              </a:rPr>
+              <a:t>•  Gibson, J., Olivia, S., Boe-Gibson, G.  (2020). Night Lights in Economics:
+Sources and Uses.  Journal of Economic Surveys , 34(5), 955–980. 
+ A critical review. Read it alongside Henderson et al., not instead of it.</a:t>
+            </a:r>
+          </a:p>
+          <a:p>
+            <a:pPr>
+              <a:spcAft>
+                <a:spcPts val="700"/>
+              </a:spcAft>
+            </a:pPr>
+            <a:r>
+              <a:rPr sz="1400">
+                <a:solidFill>
+                  <a:srgbClr val="33403A"/>
+                </a:solidFill>
+                <a:latin typeface="Segoe UI"/>
+              </a:rPr>
+              <a:t>•  Gibson, J., Olivia, S., Boe-Gibson, G., Li, C.  (2021). Which night lights
+data should we use in economics, and where?  Journal of Development Economics ,
+149, 102602.  10.1016/j.jdeveco.2020.102602  
+ Why naming your product and version is not pedantry.</a:t>
+            </a:r>
+          </a:p>
+          <a:p>
+            <a:pPr>
+              <a:spcAft>
+                <a:spcPts val="700"/>
+              </a:spcAft>
+            </a:pPr>
+            <a:r>
+              <a:rPr sz="1400">
+                <a:solidFill>
+                  <a:srgbClr val="33403A"/>
+                </a:solidFill>
+                <a:latin typeface="Segoe UI"/>
+              </a:rPr>
+              <a:t>•  Bluhm, R., Krause, M.  (2022). Top lights: Bright cities and their
+contribution to economic development.  Journal of Development Economics , 157,
+102880.  10.1016/j.jdeveco.2022.102880  
+ Saturation correction reverses the Sub-Saharan primary/secondary city finding.</a:t>
+            </a:r>
+          </a:p>
+          <a:p>
+            <a:pPr>
+              <a:spcAft>
+                <a:spcPts val="700"/>
+              </a:spcAft>
+            </a:pPr>
+            <a:r>
+              <a:rPr sz="1400">
+                <a:solidFill>
+                  <a:srgbClr val="33403A"/>
+                </a:solidFill>
+                <a:latin typeface="Segoe UI"/>
+              </a:rPr>
+              <a:t>•  Min, B., Gaba, K.M., Sarr, O.F., Agalassou, A.  (2013). Detection of rural
+electrification in Africa using DMSP-OLS night lights imagery.  International
+Journal of Remote Sensing , 34(22), 8118–8141.
+ 10.1080/01431161.2013.833358  
+ Senegal and Mali, validated against ground records. The African reference.</a:t>
+            </a:r>
+          </a:p>
+          <a:p>
+            <a:pPr>
+              <a:spcAft>
+                <a:spcPts val="700"/>
+              </a:spcAft>
+            </a:pPr>
+            <a:r>
+              <a:rPr sz="1400">
+                <a:solidFill>
+                  <a:srgbClr val="33403A"/>
+                </a:solidFill>
+                <a:latin typeface="Segoe UI"/>
+              </a:rPr>
+              <a:t>•  Elvidge, C.D., Zhizhin, M., Baugh, K., Hsu, F.-C., Ghosh, T.  (2016).
+Methods for Global Survey of Natural Gas Flaring from Visible Infrared Imaging
+Radiometer Suite Data.  Energies , 9(1), 14.
+ 10.3390/en9010014  
+ How flares are detected — and therefore how to mask them out of your totals.</a:t>
+            </a:r>
+          </a:p>
+        </p:txBody>
+      </p:sp>
+      <p:sp>
+        <p:nvSpPr>
+          <p:cNvPr id="6" name="TextBox 5"/>
+          <p:cNvSpPr txBox="1"/>
+          <p:nvPr/>
+        </p:nvSpPr>
+        <p:spPr>
+          <a:xfrm>
+            <a:off x="731520" y="6400800"/>
+            <a:ext cx="10728655" cy="274320"/>
+          </a:xfrm>
+          <a:prstGeom prst="rect">
+            <a:avLst/>
+          </a:prstGeom>
+          <a:noFill/>
+        </p:spPr>
+        <p:txBody>
+          <a:bodyPr wrap="square">
+            <a:spAutoFit/>
+          </a:bodyPr>
+          <a:lstStyle/>
+          <a:p>
+            <a:pPr algn="l"/>
+            <a:r>
+              <a:rPr sz="900" b="0">
+                <a:solidFill>
+                  <a:srgbClr val="6B7B75"/>
+                </a:solidFill>
+                <a:latin typeface="Segoe UI"/>
+              </a:rPr>
+              <a:t>African Development Bank · AU STATAFRIC · STG17</a:t>
+            </a:r>
+          </a:p>
+        </p:txBody>
+      </p:sp>
+    </p:spTree>
+  </p:cSld>
+  <p:clrMapOvr>
+    <a:masterClrMapping/>
+  </p:clrMapOvr>
+</p:sld>
+</file>
+
+<file path=ppt/slides/slide22.xml><?xml version="1.0" encoding="utf-8"?>
+<p:sld xmlns:a="http://schemas.openxmlformats.org/drawingml/2006/main" xmlns:p="http://schemas.openxmlformats.org/presentationml/2006/main" xmlns:r="http://schemas.openxmlformats.org/officeDocument/2006/relationships">
+  <p:cSld>
+    <p:spTree>
+      <p:nvGrpSpPr>
+        <p:cNvPr id="1" name=""/>
+        <p:cNvGrpSpPr/>
+        <p:nvPr/>
+      </p:nvGrpSpPr>
+      <p:grpSpPr/>
+      <p:sp>
+        <p:nvSpPr>
+          <p:cNvPr id="2" name="Rectangle 1"/>
           <p:cNvSpPr/>
           <p:nvPr/>
         </p:nvSpPr>
         <p:spPr>
           <a:xfrm>
-            <a:off x="731520" y="4389120"/>
-            <a:ext cx="10728655" cy="960120"/>
+            <a:off x="0" y="0"/>
+            <a:ext cx="12191695" cy="6858000"/>
           </a:xfrm>
           <a:prstGeom prst="rect">
             <a:avLst/>
           </a:prstGeom>
           <a:solidFill>
-            <a:srgbClr val="F4F8F5"/>
+            <a:srgbClr val="0B2545"/>
           </a:solidFill>
           <a:ln>
-            <a:solidFill>
-              <a:srgbClr val="1B7A43"/>
-            </a:solidFill>
+            <a:noFill/>
           </a:ln>
           <a:effectLst/>
         </p:spPr>
@@ -6413,34 +6680,23 @@
           </a:fontRef>
         </p:style>
         <p:txBody>
-          <a:bodyPr rtlCol="0" anchor="ctr" wrap="square"/>
+          <a:bodyPr rtlCol="0" anchor="ctr"/>
           <a:lstStyle/>
           <a:p>
             <a:pPr algn="ctr"/>
-            <a:r>
-              <a:rPr sz="1200">
-                <a:solidFill>
-                  <a:srgbClr val="33403A"/>
-                </a:solidFill>
-                <a:latin typeface="Segoe UI"/>
-              </a:rPr>
-              <a:t>THE PROPOSITION — Not "light equals GDP". Rather: a spatially detailed, frequently updated signal
-that  correlates  with activity and infrastructure, whose relationship to
-your own official figures you can measure — and then decide whether to use.</a:t>
-            </a:r>
-          </a:p>
-        </p:txBody>
-      </p:sp>
-      <p:sp>
-        <p:nvSpPr>
-          <p:cNvPr id="9" name="TextBox 8"/>
+          </a:p>
+        </p:txBody>
+      </p:sp>
+      <p:sp>
+        <p:nvSpPr>
+          <p:cNvPr id="3" name="TextBox 2"/>
           <p:cNvSpPr txBox="1"/>
           <p:nvPr/>
         </p:nvSpPr>
         <p:spPr>
           <a:xfrm>
-            <a:off x="731520" y="6400800"/>
-            <a:ext cx="10728655" cy="274320"/>
+            <a:off x="1097280" y="2377440"/>
+            <a:ext cx="9997135" cy="2286000"/>
           </a:xfrm>
           <a:prstGeom prst="rect">
             <a:avLst/>
@@ -6453,15 +6709,18 @@
           </a:bodyPr>
           <a:lstStyle/>
           <a:p>
-            <a:pPr algn="l"/>
-            <a:r>
-              <a:rPr sz="900" b="0">
-                <a:solidFill>
-                  <a:srgbClr val="6B7B75"/>
-                </a:solidFill>
-                <a:latin typeface="Segoe UI"/>
-              </a:rPr>
-              <a:t>African Development Bank · AU STATAFRIC · STG17</a:t>
+            <a:pPr algn="ctr"/>
+            <a:r>
+              <a:rPr sz="1400" b="0">
+                <a:solidFill>
+                  <a:srgbClr val="DBE7E0"/>
+                </a:solidFill>
+                <a:latin typeface="Segoe UI"/>
+              </a:rPr>
+              <a:t>This PowerPoint file is generated from the reveal.js deck at
+slides/decks/08-ntl-what-darkness-tells-us.deck.html
+Edits made here do not flow back. If your change should be permanent,
+edit the deck source and run:  python tools/build_slides.py &amp;&amp; python tools/build_pptx.py</a:t>
             </a:r>
           </a:p>
         </p:txBody>
@@ -6536,7 +6795,7 @@
         <p:spPr>
           <a:xfrm>
             <a:off x="731520" y="502920"/>
-            <a:ext cx="10728655" cy="914400"/>
+            <a:ext cx="10728655" cy="320040"/>
           </a:xfrm>
           <a:prstGeom prst="rect">
             <a:avLst/>
@@ -6551,13 +6810,13 @@
           <a:p>
             <a:pPr algn="l"/>
             <a:r>
-              <a:rPr sz="2800" b="1">
-                <a:solidFill>
-                  <a:srgbClr val="0B2545"/>
-                </a:solidFill>
-                <a:latin typeface="Segoe UI"/>
-              </a:rPr>
-              <a:t>What the literature actually establishes</a:t>
+              <a:rPr sz="1100" b="1">
+                <a:solidFill>
+                  <a:srgbClr val="1B7A43"/>
+                </a:solidFill>
+                <a:latin typeface="Segoe UI"/>
+              </a:rPr>
+              <a:t>THE PROPOSITION, STATED HONESTLY</a:t>
             </a:r>
           </a:p>
         </p:txBody>
@@ -6565,6 +6824,99 @@
       <p:sp>
         <p:nvSpPr>
           <p:cNvPr id="4" name="TextBox 3"/>
+          <p:cNvSpPr txBox="1"/>
+          <p:nvPr/>
+        </p:nvSpPr>
+        <p:spPr>
+          <a:xfrm>
+            <a:off x="731520" y="914400"/>
+            <a:ext cx="10728655" cy="548640"/>
+          </a:xfrm>
+          <a:prstGeom prst="rect">
+            <a:avLst/>
+          </a:prstGeom>
+          <a:noFill/>
+        </p:spPr>
+        <p:txBody>
+          <a:bodyPr wrap="square">
+            <a:spAutoFit/>
+          </a:bodyPr>
+          <a:lstStyle/>
+          <a:p>
+            <a:pPr algn="l"/>
+            <a:r>
+              <a:rPr sz="1400" b="0">
+                <a:solidFill>
+                  <a:srgbClr val="33403A"/>
+                </a:solidFill>
+                <a:latin typeface="Segoe UI"/>
+              </a:rPr>
+              <a:t>A spatially detailed signal that  correlates  with activity and
+infrastructure — whose relationship to your own official figures you can measure,
+and only then decide whether to use.</a:t>
+            </a:r>
+          </a:p>
+        </p:txBody>
+      </p:sp>
+      <p:sp>
+        <p:nvSpPr>
+          <p:cNvPr id="5" name="Rectangle 4"/>
+          <p:cNvSpPr/>
+          <p:nvPr/>
+        </p:nvSpPr>
+        <p:spPr>
+          <a:xfrm>
+            <a:off x="731520" y="1417320"/>
+            <a:ext cx="10728655" cy="960120"/>
+          </a:xfrm>
+          <a:prstGeom prst="rect">
+            <a:avLst/>
+          </a:prstGeom>
+          <a:solidFill>
+            <a:srgbClr val="F4F8F5"/>
+          </a:solidFill>
+          <a:ln>
+            <a:solidFill>
+              <a:srgbClr val="1B7A43"/>
+            </a:solidFill>
+          </a:ln>
+          <a:effectLst/>
+        </p:spPr>
+        <p:style>
+          <a:lnRef idx="1">
+            <a:schemeClr val="accent1"/>
+          </a:lnRef>
+          <a:fillRef idx="3">
+            <a:schemeClr val="accent1"/>
+          </a:fillRef>
+          <a:effectRef idx="2">
+            <a:schemeClr val="accent1"/>
+          </a:effectRef>
+          <a:fontRef idx="minor">
+            <a:schemeClr val="lt1"/>
+          </a:fontRef>
+        </p:style>
+        <p:txBody>
+          <a:bodyPr rtlCol="0" anchor="ctr" wrap="square"/>
+          <a:lstStyle/>
+          <a:p>
+            <a:pPr algn="ctr"/>
+            <a:r>
+              <a:rPr sz="1200">
+                <a:solidFill>
+                  <a:srgbClr val="33403A"/>
+                </a:solidFill>
+                <a:latin typeface="Segoe UI"/>
+              </a:rPr>
+              <a:t>WHAT YOU ARE ACTUALLY DECIDING TODAY — Not whether night-time lights are good. Whether they are good enough,
+ in your country, for one named question .</a:t>
+            </a:r>
+          </a:p>
+        </p:txBody>
+      </p:sp>
+      <p:sp>
+        <p:nvSpPr>
+          <p:cNvPr id="6" name="TextBox 5"/>
           <p:cNvSpPr txBox="1"/>
           <p:nvPr/>
         </p:nvSpPr>
@@ -6624,18 +6976,17 @@
         <p:spPr>
           <a:xfrm>
             <a:off x="0" y="0"/>
-            <a:ext cx="12191695" cy="6858000"/>
+            <a:ext cx="12191695" cy="60000"/>
           </a:xfrm>
           <a:prstGeom prst="rect">
             <a:avLst/>
           </a:prstGeom>
           <a:solidFill>
-            <a:srgbClr val="0B2545"/>
+            <a:srgbClr val="F2A900"/>
           </a:solidFill>
           <a:ln>
             <a:noFill/>
           </a:ln>
-          <a:effectLst/>
         </p:spPr>
         <p:style>
           <a:lnRef idx="1">
@@ -6668,7 +7019,7 @@
         <p:spPr>
           <a:xfrm>
             <a:off x="731520" y="502920"/>
-            <a:ext cx="10728655" cy="320040"/>
+            <a:ext cx="10728655" cy="914400"/>
           </a:xfrm>
           <a:prstGeom prst="rect">
             <a:avLst/>
@@ -6683,13 +7034,13 @@
           <a:p>
             <a:pPr algn="l"/>
             <a:r>
-              <a:rPr sz="1100" b="1">
-                <a:solidFill>
-                  <a:srgbClr val="F2A900"/>
-                </a:solidFill>
-                <a:latin typeface="Segoe UI"/>
-              </a:rPr>
-              <a:t>PART 1</a:t>
+              <a:rPr sz="2800" b="1">
+                <a:solidFill>
+                  <a:srgbClr val="0B2545"/>
+                </a:solidFill>
+                <a:latin typeface="Segoe UI"/>
+              </a:rPr>
+              <a:t>What the literature establishes — it works</a:t>
             </a:r>
           </a:p>
         </p:txBody>
@@ -6697,76 +7048,6 @@
       <p:sp>
         <p:nvSpPr>
           <p:cNvPr id="4" name="TextBox 3"/>
-          <p:cNvSpPr txBox="1"/>
-          <p:nvPr/>
-        </p:nvSpPr>
-        <p:spPr>
-          <a:xfrm>
-            <a:off x="731520" y="914400"/>
-            <a:ext cx="10728655" cy="914400"/>
-          </a:xfrm>
-          <a:prstGeom prst="rect">
-            <a:avLst/>
-          </a:prstGeom>
-          <a:noFill/>
-        </p:spPr>
-        <p:txBody>
-          <a:bodyPr wrap="square">
-            <a:spAutoFit/>
-          </a:bodyPr>
-          <a:lstStyle/>
-          <a:p>
-            <a:pPr algn="l"/>
-            <a:r>
-              <a:rPr sz="2800" b="1">
-                <a:solidFill>
-                  <a:srgbClr val="FFFFFF"/>
-                </a:solidFill>
-                <a:latin typeface="Segoe UI"/>
-              </a:rPr>
-              <a:t>Where the data comes from</a:t>
-            </a:r>
-          </a:p>
-        </p:txBody>
-      </p:sp>
-      <p:sp>
-        <p:nvSpPr>
-          <p:cNvPr id="5" name="TextBox 4"/>
-          <p:cNvSpPr txBox="1"/>
-          <p:nvPr/>
-        </p:nvSpPr>
-        <p:spPr>
-          <a:xfrm>
-            <a:off x="731520" y="1783080"/>
-            <a:ext cx="10728655" cy="548640"/>
-          </a:xfrm>
-          <a:prstGeom prst="rect">
-            <a:avLst/>
-          </a:prstGeom>
-          <a:noFill/>
-        </p:spPr>
-        <p:txBody>
-          <a:bodyPr wrap="square">
-            <a:spAutoFit/>
-          </a:bodyPr>
-          <a:lstStyle/>
-          <a:p>
-            <a:pPr algn="l"/>
-            <a:r>
-              <a:rPr sz="1400" b="0">
-                <a:solidFill>
-                  <a:srgbClr val="DBE7E0"/>
-                </a:solidFill>
-                <a:latin typeface="Segoe UI"/>
-              </a:rPr>
-              <a:t>Two instruments, thirty years, and one discontinuity you must not ignore.</a:t>
-            </a:r>
-          </a:p>
-        </p:txBody>
-      </p:sp>
-      <p:sp>
-        <p:nvSpPr>
-          <p:cNvPr id="6" name="TextBox 5"/>
           <p:cNvSpPr txBox="1"/>
           <p:nvPr/>
         </p:nvSpPr>
@@ -6890,107 +7171,14 @@
                 </a:solidFill>
                 <a:latin typeface="Segoe UI"/>
               </a:rPr>
-              <a:t>Thirty years, two instruments</a:t>
-            </a:r>
-          </a:p>
-        </p:txBody>
-      </p:sp>
-      <p:sp>
-        <p:nvSpPr>
-          <p:cNvPr id="4" name="Rectangle 3"/>
-          <p:cNvSpPr/>
-          <p:nvPr/>
-        </p:nvSpPr>
-        <p:spPr>
-          <a:xfrm>
-            <a:off x="731520" y="1371600"/>
-            <a:ext cx="10728655" cy="960120"/>
-          </a:xfrm>
-          <a:prstGeom prst="rect">
-            <a:avLst/>
-          </a:prstGeom>
-          <a:solidFill>
-            <a:srgbClr val="F4F8F5"/>
-          </a:solidFill>
-          <a:ln>
-            <a:solidFill>
-              <a:srgbClr val="1B7A43"/>
-            </a:solidFill>
-          </a:ln>
-          <a:effectLst/>
-        </p:spPr>
-        <p:style>
-          <a:lnRef idx="1">
-            <a:schemeClr val="accent1"/>
-          </a:lnRef>
-          <a:fillRef idx="3">
-            <a:schemeClr val="accent1"/>
-          </a:fillRef>
-          <a:effectRef idx="2">
-            <a:schemeClr val="accent1"/>
-          </a:effectRef>
-          <a:fontRef idx="minor">
-            <a:schemeClr val="lt1"/>
-          </a:fontRef>
-        </p:style>
-        <p:txBody>
-          <a:bodyPr rtlCol="0" anchor="ctr" wrap="square"/>
-          <a:lstStyle/>
-          <a:p>
-            <a:pPr algn="ctr"/>
-            <a:r>
-              <a:rPr sz="1200">
-                <a:solidFill>
-                  <a:srgbClr val="33403A"/>
-                </a:solidFill>
-                <a:latin typeface="Segoe UI"/>
-              </a:rPr>
-              <a:t>THE DISCONTINUITY — DMSP-OLS reports an uncalibrated 6-bit digital number; VIIRS reports calibrated
-radiance.  Never splice the two without an explicit harmonisation step  —
-and if you do harmonise, say which method you used, because they disagree.
-Most published African NTL work starts in 2012 for exactly this reason, and so does this workshop.</a:t>
-            </a:r>
-          </a:p>
-        </p:txBody>
-      </p:sp>
-      <p:sp>
-        <p:nvSpPr>
-          <p:cNvPr id="5" name="TextBox 4"/>
-          <p:cNvSpPr txBox="1"/>
-          <p:nvPr/>
-        </p:nvSpPr>
-        <p:spPr>
-          <a:xfrm>
-            <a:off x="731520" y="2468880"/>
-            <a:ext cx="10728655" cy="640080"/>
-          </a:xfrm>
-          <a:prstGeom prst="rect">
-            <a:avLst/>
-          </a:prstGeom>
-          <a:noFill/>
-        </p:spPr>
-        <p:txBody>
-          <a:bodyPr wrap="square">
-            <a:spAutoFit/>
-          </a:bodyPr>
-          <a:lstStyle/>
-          <a:p>
-            <a:pPr algn="l"/>
-            <a:r>
-              <a:rPr sz="1100" b="0">
-                <a:solidFill>
-                  <a:srgbClr val="6B7B75"/>
-                </a:solidFill>
-                <a:latin typeface="Segoe UI"/>
-              </a:rPr>
-              <a:t>FIGURE — screenshot slide 5 of the HTML deck and paste it here.  (The two records are different instruments with different units. They are not one series.)</a:t>
-            </a:r>
-          </a:p>
-        </p:txBody>
-      </p:sp>
-      <p:sp>
-        <p:nvSpPr>
-          <p:cNvPr id="6" name="TextBox 5"/>
+              <a:t>…and it fails quietly</a:t>
+            </a:r>
+          </a:p>
+        </p:txBody>
+      </p:sp>
+      <p:sp>
+        <p:nvSpPr>
+          <p:cNvPr id="4" name="TextBox 3"/>
           <p:cNvSpPr txBox="1"/>
           <p:nvPr/>
         </p:nvSpPr>
@@ -7050,6 +7238,208 @@
         <p:spPr>
           <a:xfrm>
             <a:off x="0" y="0"/>
+            <a:ext cx="12191695" cy="6858000"/>
+          </a:xfrm>
+          <a:prstGeom prst="rect">
+            <a:avLst/>
+          </a:prstGeom>
+          <a:solidFill>
+            <a:srgbClr val="0B2545"/>
+          </a:solidFill>
+          <a:ln>
+            <a:noFill/>
+          </a:ln>
+          <a:effectLst/>
+        </p:spPr>
+        <p:style>
+          <a:lnRef idx="1">
+            <a:schemeClr val="accent1"/>
+          </a:lnRef>
+          <a:fillRef idx="3">
+            <a:schemeClr val="accent1"/>
+          </a:fillRef>
+          <a:effectRef idx="2">
+            <a:schemeClr val="accent1"/>
+          </a:effectRef>
+          <a:fontRef idx="minor">
+            <a:schemeClr val="lt1"/>
+          </a:fontRef>
+        </p:style>
+        <p:txBody>
+          <a:bodyPr rtlCol="0" anchor="ctr"/>
+          <a:lstStyle/>
+          <a:p>
+            <a:pPr algn="ctr"/>
+          </a:p>
+        </p:txBody>
+      </p:sp>
+      <p:sp>
+        <p:nvSpPr>
+          <p:cNvPr id="3" name="TextBox 2"/>
+          <p:cNvSpPr txBox="1"/>
+          <p:nvPr/>
+        </p:nvSpPr>
+        <p:spPr>
+          <a:xfrm>
+            <a:off x="731520" y="502920"/>
+            <a:ext cx="10728655" cy="320040"/>
+          </a:xfrm>
+          <a:prstGeom prst="rect">
+            <a:avLst/>
+          </a:prstGeom>
+          <a:noFill/>
+        </p:spPr>
+        <p:txBody>
+          <a:bodyPr wrap="square">
+            <a:spAutoFit/>
+          </a:bodyPr>
+          <a:lstStyle/>
+          <a:p>
+            <a:pPr algn="l"/>
+            <a:r>
+              <a:rPr sz="1100" b="1">
+                <a:solidFill>
+                  <a:srgbClr val="F2A900"/>
+                </a:solidFill>
+                <a:latin typeface="Segoe UI"/>
+              </a:rPr>
+              <a:t>PART 1</a:t>
+            </a:r>
+          </a:p>
+        </p:txBody>
+      </p:sp>
+      <p:sp>
+        <p:nvSpPr>
+          <p:cNvPr id="4" name="TextBox 3"/>
+          <p:cNvSpPr txBox="1"/>
+          <p:nvPr/>
+        </p:nvSpPr>
+        <p:spPr>
+          <a:xfrm>
+            <a:off x="731520" y="914400"/>
+            <a:ext cx="10728655" cy="914400"/>
+          </a:xfrm>
+          <a:prstGeom prst="rect">
+            <a:avLst/>
+          </a:prstGeom>
+          <a:noFill/>
+        </p:spPr>
+        <p:txBody>
+          <a:bodyPr wrap="square">
+            <a:spAutoFit/>
+          </a:bodyPr>
+          <a:lstStyle/>
+          <a:p>
+            <a:pPr algn="l"/>
+            <a:r>
+              <a:rPr sz="2800" b="1">
+                <a:solidFill>
+                  <a:srgbClr val="FFFFFF"/>
+                </a:solidFill>
+                <a:latin typeface="Segoe UI"/>
+              </a:rPr>
+              <a:t>Where the data comes from</a:t>
+            </a:r>
+          </a:p>
+        </p:txBody>
+      </p:sp>
+      <p:sp>
+        <p:nvSpPr>
+          <p:cNvPr id="5" name="TextBox 4"/>
+          <p:cNvSpPr txBox="1"/>
+          <p:nvPr/>
+        </p:nvSpPr>
+        <p:spPr>
+          <a:xfrm>
+            <a:off x="731520" y="1783080"/>
+            <a:ext cx="10728655" cy="548640"/>
+          </a:xfrm>
+          <a:prstGeom prst="rect">
+            <a:avLst/>
+          </a:prstGeom>
+          <a:noFill/>
+        </p:spPr>
+        <p:txBody>
+          <a:bodyPr wrap="square">
+            <a:spAutoFit/>
+          </a:bodyPr>
+          <a:lstStyle/>
+          <a:p>
+            <a:pPr algn="l"/>
+            <a:r>
+              <a:rPr sz="1400" b="0">
+                <a:solidFill>
+                  <a:srgbClr val="DBE7E0"/>
+                </a:solidFill>
+                <a:latin typeface="Segoe UI"/>
+              </a:rPr>
+              <a:t>Two instruments, thirty years, and one discontinuity you must not ignore.</a:t>
+            </a:r>
+          </a:p>
+        </p:txBody>
+      </p:sp>
+      <p:sp>
+        <p:nvSpPr>
+          <p:cNvPr id="6" name="TextBox 5"/>
+          <p:cNvSpPr txBox="1"/>
+          <p:nvPr/>
+        </p:nvSpPr>
+        <p:spPr>
+          <a:xfrm>
+            <a:off x="731520" y="6400800"/>
+            <a:ext cx="10728655" cy="274320"/>
+          </a:xfrm>
+          <a:prstGeom prst="rect">
+            <a:avLst/>
+          </a:prstGeom>
+          <a:noFill/>
+        </p:spPr>
+        <p:txBody>
+          <a:bodyPr wrap="square">
+            <a:spAutoFit/>
+          </a:bodyPr>
+          <a:lstStyle/>
+          <a:p>
+            <a:pPr algn="l"/>
+            <a:r>
+              <a:rPr sz="900" b="0">
+                <a:solidFill>
+                  <a:srgbClr val="6B7B75"/>
+                </a:solidFill>
+                <a:latin typeface="Segoe UI"/>
+              </a:rPr>
+              <a:t>African Development Bank · AU STATAFRIC · STG17</a:t>
+            </a:r>
+          </a:p>
+        </p:txBody>
+      </p:sp>
+    </p:spTree>
+  </p:cSld>
+  <p:clrMapOvr>
+    <a:masterClrMapping/>
+  </p:clrMapOvr>
+</p:sld>
+</file>
+
+<file path=ppt/slides/slide7.xml><?xml version="1.0" encoding="utf-8"?>
+<p:sld xmlns:a="http://schemas.openxmlformats.org/drawingml/2006/main" xmlns:p="http://schemas.openxmlformats.org/presentationml/2006/main" xmlns:r="http://schemas.openxmlformats.org/officeDocument/2006/relationships">
+  <p:cSld>
+    <p:spTree>
+      <p:nvGrpSpPr>
+        <p:cNvPr id="1" name=""/>
+        <p:cNvGrpSpPr/>
+        <p:nvPr/>
+      </p:nvGrpSpPr>
+      <p:grpSpPr/>
+      <p:sp>
+        <p:nvSpPr>
+          <p:cNvPr id="2" name="Rectangle 1"/>
+          <p:cNvSpPr/>
+          <p:nvPr/>
+        </p:nvSpPr>
+        <p:spPr>
+          <a:xfrm>
+            <a:off x="0" y="0"/>
             <a:ext cx="12191695" cy="60000"/>
           </a:xfrm>
           <a:prstGeom prst="rect">
@@ -7114,7 +7504,7 @@
                 </a:solidFill>
                 <a:latin typeface="Segoe UI"/>
               </a:rPr>
-              <a:t>Which product, for which question</a:t>
+              <a:t>Thirty years, two instruments</a:t>
             </a:r>
           </a:p>
         </p:txBody>
@@ -7169,10 +7559,233 @@
                 </a:solidFill>
                 <a:latin typeface="Segoe UI"/>
               </a:rPr>
-              <a:t>TWO DEFENSIBLE PIPELINES, TWO DIFFERENT NUMBERS — NASA's VNP46A4 and NOAA/EOG's annual VNL cover the same years with different
-compositing and masking. A gap of a few percent between them is expected and
-healthy.  Publishing a Sum of Lights figure without naming the product and
-version is not a reproducible statistic.</a:t>
+              <a:t>THE DISCONTINUITY — DMSP-OLS reports an uncalibrated 6-bit digital number; VIIRS reports calibrated
+radiance.  Never splice the two without an explicit harmonisation step  —
+and if you do harmonise, say which method you used, because they disagree.
+Most published African NTL work starts in 2012 for exactly this reason, and so does this workshop.</a:t>
+            </a:r>
+          </a:p>
+        </p:txBody>
+      </p:sp>
+      <p:sp>
+        <p:nvSpPr>
+          <p:cNvPr id="5" name="TextBox 4"/>
+          <p:cNvSpPr txBox="1"/>
+          <p:nvPr/>
+        </p:nvSpPr>
+        <p:spPr>
+          <a:xfrm>
+            <a:off x="731520" y="2468880"/>
+            <a:ext cx="10728655" cy="640080"/>
+          </a:xfrm>
+          <a:prstGeom prst="rect">
+            <a:avLst/>
+          </a:prstGeom>
+          <a:noFill/>
+        </p:spPr>
+        <p:txBody>
+          <a:bodyPr wrap="square">
+            <a:spAutoFit/>
+          </a:bodyPr>
+          <a:lstStyle/>
+          <a:p>
+            <a:pPr algn="l"/>
+            <a:r>
+              <a:rPr sz="1100" b="0">
+                <a:solidFill>
+                  <a:srgbClr val="6B7B75"/>
+                </a:solidFill>
+                <a:latin typeface="Segoe UI"/>
+              </a:rPr>
+              <a:t>FIGURE — screenshot slide 7 of the HTML deck and paste it here.  (The two records are different instruments with different units. They are not one series.)</a:t>
+            </a:r>
+          </a:p>
+        </p:txBody>
+      </p:sp>
+      <p:sp>
+        <p:nvSpPr>
+          <p:cNvPr id="6" name="TextBox 5"/>
+          <p:cNvSpPr txBox="1"/>
+          <p:nvPr/>
+        </p:nvSpPr>
+        <p:spPr>
+          <a:xfrm>
+            <a:off x="731520" y="6400800"/>
+            <a:ext cx="10728655" cy="274320"/>
+          </a:xfrm>
+          <a:prstGeom prst="rect">
+            <a:avLst/>
+          </a:prstGeom>
+          <a:noFill/>
+        </p:spPr>
+        <p:txBody>
+          <a:bodyPr wrap="square">
+            <a:spAutoFit/>
+          </a:bodyPr>
+          <a:lstStyle/>
+          <a:p>
+            <a:pPr algn="l"/>
+            <a:r>
+              <a:rPr sz="900" b="0">
+                <a:solidFill>
+                  <a:srgbClr val="6B7B75"/>
+                </a:solidFill>
+                <a:latin typeface="Segoe UI"/>
+              </a:rPr>
+              <a:t>African Development Bank · AU STATAFRIC · STG17</a:t>
+            </a:r>
+          </a:p>
+        </p:txBody>
+      </p:sp>
+    </p:spTree>
+  </p:cSld>
+  <p:clrMapOvr>
+    <a:masterClrMapping/>
+  </p:clrMapOvr>
+</p:sld>
+</file>
+
+<file path=ppt/slides/slide8.xml><?xml version="1.0" encoding="utf-8"?>
+<p:sld xmlns:a="http://schemas.openxmlformats.org/drawingml/2006/main" xmlns:p="http://schemas.openxmlformats.org/presentationml/2006/main" xmlns:r="http://schemas.openxmlformats.org/officeDocument/2006/relationships">
+  <p:cSld>
+    <p:spTree>
+      <p:nvGrpSpPr>
+        <p:cNvPr id="1" name=""/>
+        <p:cNvGrpSpPr/>
+        <p:nvPr/>
+      </p:nvGrpSpPr>
+      <p:grpSpPr/>
+      <p:sp>
+        <p:nvSpPr>
+          <p:cNvPr id="2" name="Rectangle 1"/>
+          <p:cNvSpPr/>
+          <p:nvPr/>
+        </p:nvSpPr>
+        <p:spPr>
+          <a:xfrm>
+            <a:off x="0" y="0"/>
+            <a:ext cx="12191695" cy="60000"/>
+          </a:xfrm>
+          <a:prstGeom prst="rect">
+            <a:avLst/>
+          </a:prstGeom>
+          <a:solidFill>
+            <a:srgbClr val="F2A900"/>
+          </a:solidFill>
+          <a:ln>
+            <a:noFill/>
+          </a:ln>
+        </p:spPr>
+        <p:style>
+          <a:lnRef idx="1">
+            <a:schemeClr val="accent1"/>
+          </a:lnRef>
+          <a:fillRef idx="3">
+            <a:schemeClr val="accent1"/>
+          </a:fillRef>
+          <a:effectRef idx="2">
+            <a:schemeClr val="accent1"/>
+          </a:effectRef>
+          <a:fontRef idx="minor">
+            <a:schemeClr val="lt1"/>
+          </a:fontRef>
+        </p:style>
+        <p:txBody>
+          <a:bodyPr rtlCol="0" anchor="ctr"/>
+          <a:lstStyle/>
+          <a:p>
+            <a:pPr algn="ctr"/>
+          </a:p>
+        </p:txBody>
+      </p:sp>
+      <p:sp>
+        <p:nvSpPr>
+          <p:cNvPr id="3" name="TextBox 2"/>
+          <p:cNvSpPr txBox="1"/>
+          <p:nvPr/>
+        </p:nvSpPr>
+        <p:spPr>
+          <a:xfrm>
+            <a:off x="731520" y="502920"/>
+            <a:ext cx="10728655" cy="914400"/>
+          </a:xfrm>
+          <a:prstGeom prst="rect">
+            <a:avLst/>
+          </a:prstGeom>
+          <a:noFill/>
+        </p:spPr>
+        <p:txBody>
+          <a:bodyPr wrap="square">
+            <a:spAutoFit/>
+          </a:bodyPr>
+          <a:lstStyle/>
+          <a:p>
+            <a:pPr algn="l"/>
+            <a:r>
+              <a:rPr sz="2800" b="1">
+                <a:solidFill>
+                  <a:srgbClr val="0B2545"/>
+                </a:solidFill>
+                <a:latin typeface="Segoe UI"/>
+              </a:rPr>
+              <a:t>Which product, for which question</a:t>
+            </a:r>
+          </a:p>
+        </p:txBody>
+      </p:sp>
+      <p:sp>
+        <p:nvSpPr>
+          <p:cNvPr id="4" name="Rectangle 3"/>
+          <p:cNvSpPr/>
+          <p:nvPr/>
+        </p:nvSpPr>
+        <p:spPr>
+          <a:xfrm>
+            <a:off x="731520" y="1371600"/>
+            <a:ext cx="10728655" cy="960120"/>
+          </a:xfrm>
+          <a:prstGeom prst="rect">
+            <a:avLst/>
+          </a:prstGeom>
+          <a:solidFill>
+            <a:srgbClr val="F4F8F5"/>
+          </a:solidFill>
+          <a:ln>
+            <a:solidFill>
+              <a:srgbClr val="1B7A43"/>
+            </a:solidFill>
+          </a:ln>
+          <a:effectLst/>
+        </p:spPr>
+        <p:style>
+          <a:lnRef idx="1">
+            <a:schemeClr val="accent1"/>
+          </a:lnRef>
+          <a:fillRef idx="3">
+            <a:schemeClr val="accent1"/>
+          </a:fillRef>
+          <a:effectRef idx="2">
+            <a:schemeClr val="accent1"/>
+          </a:effectRef>
+          <a:fontRef idx="minor">
+            <a:schemeClr val="lt1"/>
+          </a:fontRef>
+        </p:style>
+        <p:txBody>
+          <a:bodyPr rtlCol="0" anchor="ctr" wrap="square"/>
+          <a:lstStyle/>
+          <a:p>
+            <a:pPr algn="ctr"/>
+            <a:r>
+              <a:rPr sz="1200">
+                <a:solidFill>
+                  <a:srgbClr val="33403A"/>
+                </a:solidFill>
+                <a:latin typeface="Segoe UI"/>
+              </a:rPr>
+              <a:t>TWO DEFENSIBLE PIPELINES, TWO DIFFERENT NUMBERS — VNP46A4 and the annual VNL composite and mask differently. A gap of a few percent
+is expected.  A Sum of Lights figure without a named product and version
+is not a reproducible statistic.</a:t>
             </a:r>
           </a:p>
         </p:txBody>
@@ -7196,10 +7809,9 @@
                 <a:tableStyleId>{5C22544A-7EE6-4342-B048-85BDC9FD1C3A}</a:tableStyleId>
               </a:tblPr>
               <a:tblGrid>
-                <a:gridCol w="2682163"/>
-                <a:gridCol w="2682163"/>
-                <a:gridCol w="2682163"/>
-                <a:gridCol w="2682166"/>
+                <a:gridCol w="3576218"/>
+                <a:gridCol w="3576218"/>
+                <a:gridCol w="3576219"/>
               </a:tblGrid>
               <a:tr h="292608">
                 <a:tc>
@@ -7215,24 +7827,6 @@
                           <a:latin typeface="Segoe UI"/>
                         </a:rPr>
                         <a:t>Product</a:t>
-                      </a:r>
-                    </a:p>
-                  </a:txBody>
-                  <a:tcPr/>
-                </a:tc>
-                <a:tc>
-                  <a:txBody>
-                    <a:bodyPr/>
-                    <a:lstStyle/>
-                    <a:p>
-                      <a:r>
-                        <a:rPr sz="1000" b="1">
-                          <a:solidFill>
-                            <a:srgbClr val="FFFFFF"/>
-                          </a:solidFill>
-                          <a:latin typeface="Segoe UI"/>
-                        </a:rPr>
-                        <a:t>Cadence</a:t>
                       </a:r>
                     </a:p>
                   </a:txBody>
@@ -7268,7 +7862,7 @@
                           </a:solidFill>
                           <a:latin typeface="Segoe UI"/>
                         </a:rPr>
-                        <a:t>Do not use it for</a:t>
+                        <a:t>Not for</a:t>
                       </a:r>
                     </a:p>
                   </a:txBody>
@@ -7288,7 +7882,7 @@
                           </a:solidFill>
                           <a:latin typeface="Segoe UI"/>
                         </a:rPr>
-                        <a:t>VNP46A2  Black Marble daily</a:t>
+                        <a:t>VNP46A2  Black Marble, daily</a:t>
                       </a:r>
                     </a:p>
                   </a:txBody>
@@ -7306,7 +7900,7 @@
                           </a:solidFill>
                           <a:latin typeface="Segoe UI"/>
                         </a:rPr>
-                        <a:t>Daily</a:t>
+                        <a:t>Crisis, conflict, outages, a specific night</a:t>
                       </a:r>
                     </a:p>
                   </a:txBody>
@@ -7324,25 +7918,7 @@
                           </a:solidFill>
                           <a:latin typeface="Segoe UI"/>
                         </a:rPr>
-                        <a:t>Crisis and conflict monitoring; a specific night; power-outage detection</a:t>
-                      </a:r>
-                    </a:p>
-                  </a:txBody>
-                  <a:tcPr/>
-                </a:tc>
-                <a:tc>
-                  <a:txBody>
-                    <a:bodyPr/>
-                    <a:lstStyle/>
-                    <a:p>
-                      <a:r>
-                        <a:rPr sz="1000" b="0">
-                          <a:solidFill>
-                            <a:srgbClr val="33403A"/>
-                          </a:solidFill>
-                          <a:latin typeface="Segoe UI"/>
-                        </a:rPr>
-                        <a:t>Any trend — the day-to-day noise dominates</a:t>
+                        <a:t>Any trend</a:t>
                       </a:r>
                     </a:p>
                   </a:txBody>
@@ -7362,7 +7938,7 @@
                           </a:solidFill>
                           <a:latin typeface="Segoe UI"/>
                         </a:rPr>
-                        <a:t>VNP46A3  Black Marble monthly</a:t>
+                        <a:t>VNP46A3  Black Marble, monthly</a:t>
                       </a:r>
                     </a:p>
                   </a:txBody>
@@ -7380,7 +7956,7 @@
                           </a:solidFill>
                           <a:latin typeface="Segoe UI"/>
                         </a:rPr>
-                        <a:t>Monthly</a:t>
+                        <a:t>Seasonality, harmattan and monsoon effects</a:t>
                       </a:r>
                     </a:p>
                   </a:txBody>
@@ -7398,25 +7974,7 @@
                           </a:solidFill>
                           <a:latin typeface="Segoe UI"/>
                         </a:rPr>
-                        <a:t>Seasonality; within-year dynamics; harmattan and monsoon effects</a:t>
-                      </a:r>
-                    </a:p>
-                  </a:txBody>
-                  <a:tcPr/>
-                </a:tc>
-                <a:tc>
-                  <a:txBody>
-                    <a:bodyPr/>
-                    <a:lstStyle/>
-                    <a:p>
-                      <a:r>
-                        <a:rPr sz="1000" b="0">
-                          <a:solidFill>
-                            <a:srgbClr val="33403A"/>
-                          </a:solidFill>
-                          <a:latin typeface="Segoe UI"/>
-                        </a:rPr>
-                        <a:t>Comparing different months as if they were equivalent</a:t>
+                        <a:t>Comparing unlike months</a:t>
                       </a:r>
                     </a:p>
                   </a:txBody>
@@ -7436,25 +7994,7 @@
                           </a:solidFill>
                           <a:latin typeface="Segoe UI"/>
                         </a:rPr>
-                        <a:t>VNP46A4  Black Marble annual</a:t>
-                      </a:r>
-                    </a:p>
-                  </a:txBody>
-                  <a:tcPr/>
-                </a:tc>
-                <a:tc>
-                  <a:txBody>
-                    <a:bodyPr/>
-                    <a:lstStyle/>
-                    <a:p>
-                      <a:r>
-                        <a:rPr sz="1000" b="0">
-                          <a:solidFill>
-                            <a:srgbClr val="33403A"/>
-                          </a:solidFill>
-                          <a:latin typeface="Segoe UI"/>
-                        </a:rPr>
-                        <a:t>Annual</a:t>
+                        <a:t>VNP46A4  Black Marble, annual</a:t>
                       </a:r>
                     </a:p>
                   </a:txBody>
@@ -7528,7 +8068,7 @@
                           </a:solidFill>
                           <a:latin typeface="Segoe UI"/>
                         </a:rPr>
-                        <a:t>Annual</a:t>
+                        <a:t>The same job, nothing downloaded</a:t>
                       </a:r>
                     </a:p>
                   </a:txBody>
@@ -7546,25 +8086,7 @@
                           </a:solidFill>
                           <a:latin typeface="Segoe UI"/>
                         </a:rPr>
-                        <a:t>The same job with no download at all</a:t>
-                      </a:r>
-                    </a:p>
-                  </a:txBody>
-                  <a:tcPr/>
-                </a:tc>
-                <a:tc>
-                  <a:txBody>
-                    <a:bodyPr/>
-                    <a:lstStyle/>
-                    <a:p>
-                      <a:r>
-                        <a:rPr sz="1000" b="0">
-                          <a:solidFill>
-                            <a:srgbClr val="33403A"/>
-                          </a:solidFill>
-                          <a:latin typeface="Segoe UI"/>
-                        </a:rPr>
-                        <a:t>Assuming it equals VNP46A4 — it does not</a:t>
+                        <a:t>Assuming it equals VNP46A4</a:t>
                       </a:r>
                     </a:p>
                   </a:txBody>
@@ -7618,7 +8140,7 @@
 </p:sld>
 </file>
 
-<file path=ppt/slides/slide7.xml><?xml version="1.0" encoding="utf-8"?>
+<file path=ppt/slides/slide9.xml><?xml version="1.0" encoding="utf-8"?>
 <p:sld xmlns:a="http://schemas.openxmlformats.org/drawingml/2006/main" xmlns:p="http://schemas.openxmlformats.org/presentationml/2006/main" xmlns:r="http://schemas.openxmlformats.org/officeDocument/2006/relationships">
   <p:cSld>
     <p:spTree>
@@ -7701,80 +8223,21 @@
                 </a:solidFill>
                 <a:latin typeface="Segoe UI"/>
               </a:rPr>
-              <a:t>Where to actually get it — four routes, all free</a:t>
-            </a:r>
-          </a:p>
-        </p:txBody>
-      </p:sp>
-      <p:sp>
-        <p:nvSpPr>
-          <p:cNvPr id="4" name="Rectangle 3"/>
-          <p:cNvSpPr/>
-          <p:nvPr/>
-        </p:nvSpPr>
-        <p:spPr>
-          <a:xfrm>
-            <a:off x="731520" y="1371600"/>
-            <a:ext cx="10728655" cy="960120"/>
-          </a:xfrm>
-          <a:prstGeom prst="rect">
-            <a:avLst/>
-          </a:prstGeom>
-          <a:solidFill>
-            <a:srgbClr val="F4F8F5"/>
-          </a:solidFill>
-          <a:ln>
-            <a:solidFill>
-              <a:srgbClr val="1B7A43"/>
-            </a:solidFill>
-          </a:ln>
-          <a:effectLst/>
-        </p:spPr>
-        <p:style>
-          <a:lnRef idx="1">
-            <a:schemeClr val="accent1"/>
-          </a:lnRef>
-          <a:fillRef idx="3">
-            <a:schemeClr val="accent1"/>
-          </a:fillRef>
-          <a:effectRef idx="2">
-            <a:schemeClr val="accent1"/>
-          </a:effectRef>
-          <a:fontRef idx="minor">
-            <a:schemeClr val="lt1"/>
-          </a:fontRef>
-        </p:style>
-        <p:txBody>
-          <a:bodyPr rtlCol="0" anchor="ctr" wrap="square"/>
-          <a:lstStyle/>
-          <a:p>
-            <a:pPr algn="ctr"/>
-            <a:r>
-              <a:rPr sz="1200">
-                <a:solidFill>
-                  <a:srgbClr val="33403A"/>
-                </a:solidFill>
-                <a:latin typeface="Segoe UI"/>
-              </a:rPr>
-              <a:t>FREE TO OBTAIN IS NOT FREE TO USE — Black Marble and VNL are US Government products, effectively public domain, so a
-derived national indicator can carry your office's own open-data licence. That is
- not  true of every source you will meet this week — Wednesday's Ookla data
-is CC BY-NC-SA 4.0, and both the NonCommercial and ShareAlike terms propagate into
-anything you derive from it.</a:t>
+              <a:t>Four routes to the data, all free</a:t>
             </a:r>
           </a:p>
         </p:txBody>
       </p:sp>
       <p:graphicFrame>
         <p:nvGraphicFramePr>
-          <p:cNvPr id="5" name="Table 4"/>
+          <p:cNvPr id="4" name="Table 3"/>
           <p:cNvGraphicFramePr>
             <a:graphicFrameLocks noGrp="1"/>
           </p:cNvGraphicFramePr>
           <p:nvPr/>
         </p:nvGraphicFramePr>
         <p:xfrm>
-          <a:off x="731520" y="2468880"/>
+          <a:off x="731520" y="1371600"/>
           <a:ext cx="10728655" cy="1463040"/>
         </p:xfrm>
         <a:graphic>
@@ -7784,10 +8247,9 @@
                 <a:tableStyleId>{5C22544A-7EE6-4342-B048-85BDC9FD1C3A}</a:tableStyleId>
               </a:tblPr>
               <a:tblGrid>
-                <a:gridCol w="2682163"/>
-                <a:gridCol w="2682163"/>
-                <a:gridCol w="2682163"/>
-                <a:gridCol w="2682166"/>
+                <a:gridCol w="3576218"/>
+                <a:gridCol w="3576218"/>
+                <a:gridCol w="3576219"/>
               </a:tblGrid>
               <a:tr h="292608">
                 <a:tc>
@@ -7803,24 +8265,6 @@
                           <a:latin typeface="Segoe UI"/>
                         </a:rPr>
                         <a:t>Route</a:t>
-                      </a:r>
-                    </a:p>
-                  </a:txBody>
-                  <a:tcPr/>
-                </a:tc>
-                <a:tc>
-                  <a:txBody>
-                    <a:bodyPr/>
-                    <a:lstStyle/>
-                    <a:p>
-                      <a:r>
-                        <a:rPr sz="1000" b="1">
-                          <a:solidFill>
-                            <a:srgbClr val="FFFFFF"/>
-                          </a:solidFill>
-                          <a:latin typeface="Segoe UI"/>
-                        </a:rPr>
-                        <a:t>Gives you</a:t>
                       </a:r>
                     </a:p>
                   </a:txBody>
@@ -7856,7 +8300,7 @@
                           </a:solidFill>
                           <a:latin typeface="Segoe UI"/>
                         </a:rPr>
-                        <a:t>Best when</a:t>
+                        <a:t>Take it when</a:t>
                       </a:r>
                     </a:p>
                   </a:txBody>
@@ -7894,7 +8338,7 @@
                           </a:solidFill>
                           <a:latin typeface="Segoe UI"/>
                         </a:rPr>
-                        <a:t>Black Marble VNP46A1–A4, the authoritative source</a:t>
+                        <a:t>Earthdata account + token</a:t>
                       </a:r>
                     </a:p>
                   </a:txBody>
@@ -7912,25 +8356,7 @@
                           </a:solidFill>
                           <a:latin typeface="Segoe UI"/>
                         </a:rPr>
-                        <a:t>Free Earthdata account + bearer token</a:t>
-                      </a:r>
-                    </a:p>
-                  </a:txBody>
-                  <a:tcPr/>
-                </a:tc>
-                <a:tc>
-                  <a:txBody>
-                    <a:bodyPr/>
-                    <a:lstStyle/>
-                    <a:p>
-                      <a:r>
-                        <a:rPr sz="1000" b="0">
-                          <a:solidFill>
-                            <a:srgbClr val="33403A"/>
-                          </a:solidFill>
-                          <a:latin typeface="Segoe UI"/>
-                        </a:rPr>
-                        <a:t>You want the reference product and can afford the download</a:t>
+                        <a:t>You want the reference product</a:t>
                       </a:r>
                     </a:p>
                   </a:txBody>
@@ -7968,24 +8394,6 @@
                           </a:solidFill>
                           <a:latin typeface="Segoe UI"/>
                         </a:rPr>
-                        <a:t>EOG annual VNL v2, and the gas-flare survey</a:t>
-                      </a:r>
-                    </a:p>
-                  </a:txBody>
-                  <a:tcPr/>
-                </a:tc>
-                <a:tc>
-                  <a:txBody>
-                    <a:bodyPr/>
-                    <a:lstStyle/>
-                    <a:p>
-                      <a:r>
-                        <a:rPr sz="1000" b="0">
-                          <a:solidFill>
-                            <a:srgbClr val="33403A"/>
-                          </a:solidFill>
-                          <a:latin typeface="Segoe UI"/>
-                        </a:rPr>
                         <a:t>Free registration</a:t>
                       </a:r>
                     </a:p>
@@ -8004,7 +8412,7 @@
                           </a:solidFill>
                           <a:latin typeface="Segoe UI"/>
                         </a:rPr>
-                        <a:t>You want an annual series ready to use, or a flare mask</a:t>
+                        <a:t>You want the annual series, or a flare mask</a:t>
                       </a:r>
                     </a:p>
                   </a:txBody>
@@ -8042,7 +8450,7 @@
                           </a:solidFill>
                           <a:latin typeface="Segoe UI"/>
                         </a:rPr>
-                        <a:t>The same series, computed server-side</a:t>
+                        <a:t>Free account + Cloud project</a:t>
                       </a:r>
                     </a:p>
                   </a:txBody>
@@ -8060,25 +8468,7 @@
                           </a:solidFill>
                           <a:latin typeface="Segoe UI"/>
                         </a:rPr>
-                        <a:t>Free non-commercial account + Cloud project</a:t>
-                      </a:r>
-                    </a:p>
-                  </a:txBody>
-                  <a:tcPr/>
-                </a:tc>
-                <a:tc>
-                  <a:txBody>
-                    <a:bodyPr/>
-                    <a:lstStyle/>
-                    <a:p>
-                      <a:r>
-                        <a:rPr sz="1000" b="0">
-                          <a:solidFill>
-                            <a:srgbClr val="33403A"/>
-                          </a:solidFill>
-                          <a:latin typeface="Segoe UI"/>
-                        </a:rPr>
-                        <a:t>Bandwidth is your constraint  — nothing is downloaded</a:t>
+                        <a:t>Bandwidth is your constraint</a:t>
                       </a:r>
                     </a:p>
                   </a:txBody>
@@ -8098,7 +8488,7 @@
                           </a:solidFill>
                           <a:latin typeface="Segoe UI"/>
                         </a:rPr>
-                        <a:t>World Bank « Light Every Night »  AWS Registry of Open Data</a:t>
+                        <a:t>World Bank “Light Every Night”  AWS Registry of Open Data</a:t>
                       </a:r>
                     </a:p>
                   </a:txBody>
@@ -8116,7 +8506,7 @@
                           </a:solidFill>
                           <a:latin typeface="Segoe UI"/>
                         </a:rPr>
-                        <a:t>The full 1992–present night-time archive, analysis-ready</a:t>
+                        <a:t>Nothing at all</a:t>
                       </a:r>
                     </a:p>
                   </a:txBody>
@@ -8134,25 +8524,7 @@
                           </a:solidFill>
                           <a:latin typeface="Segoe UI"/>
                         </a:rPr>
-                        <a:t>Nothing — no account at all</a:t>
-                      </a:r>
-                    </a:p>
-                  </a:txBody>
-                  <a:tcPr/>
-                </a:tc>
-                <a:tc>
-                  <a:txBody>
-                    <a:bodyPr/>
-                    <a:lstStyle/>
-                    <a:p>
-                      <a:r>
-                        <a:rPr sz="1000" b="0">
-                          <a:solidFill>
-                            <a:srgbClr val="33403A"/>
-                          </a:solidFill>
-                          <a:latin typeface="Segoe UI"/>
-                        </a:rPr>
-                        <a:t>You need the DMSP years, or an unauthenticated pipeline</a:t>
+                        <a:t>You need DMSP years, or no authentication</a:t>
                       </a:r>
                     </a:p>
                   </a:txBody>
@@ -8163,374 +8535,6 @@
           </a:graphicData>
         </a:graphic>
       </p:graphicFrame>
-      <p:sp>
-        <p:nvSpPr>
-          <p:cNvPr id="6" name="TextBox 5"/>
-          <p:cNvSpPr txBox="1"/>
-          <p:nvPr/>
-        </p:nvSpPr>
-        <p:spPr>
-          <a:xfrm>
-            <a:off x="731520" y="6400800"/>
-            <a:ext cx="10728655" cy="274320"/>
-          </a:xfrm>
-          <a:prstGeom prst="rect">
-            <a:avLst/>
-          </a:prstGeom>
-          <a:noFill/>
-        </p:spPr>
-        <p:txBody>
-          <a:bodyPr wrap="square">
-            <a:spAutoFit/>
-          </a:bodyPr>
-          <a:lstStyle/>
-          <a:p>
-            <a:pPr algn="l"/>
-            <a:r>
-              <a:rPr sz="900" b="0">
-                <a:solidFill>
-                  <a:srgbClr val="6B7B75"/>
-                </a:solidFill>
-                <a:latin typeface="Segoe UI"/>
-              </a:rPr>
-              <a:t>African Development Bank · AU STATAFRIC · STG17</a:t>
-            </a:r>
-          </a:p>
-        </p:txBody>
-      </p:sp>
-    </p:spTree>
-  </p:cSld>
-  <p:clrMapOvr>
-    <a:masterClrMapping/>
-  </p:clrMapOvr>
-</p:sld>
-</file>
-
-<file path=ppt/slides/slide8.xml><?xml version="1.0" encoding="utf-8"?>
-<p:sld xmlns:a="http://schemas.openxmlformats.org/drawingml/2006/main" xmlns:p="http://schemas.openxmlformats.org/presentationml/2006/main" xmlns:r="http://schemas.openxmlformats.org/officeDocument/2006/relationships">
-  <p:cSld>
-    <p:spTree>
-      <p:nvGrpSpPr>
-        <p:cNvPr id="1" name=""/>
-        <p:cNvGrpSpPr/>
-        <p:nvPr/>
-      </p:nvGrpSpPr>
-      <p:grpSpPr/>
-      <p:sp>
-        <p:nvSpPr>
-          <p:cNvPr id="2" name="Rectangle 1"/>
-          <p:cNvSpPr/>
-          <p:nvPr/>
-        </p:nvSpPr>
-        <p:spPr>
-          <a:xfrm>
-            <a:off x="0" y="0"/>
-            <a:ext cx="12191695" cy="6858000"/>
-          </a:xfrm>
-          <a:prstGeom prst="rect">
-            <a:avLst/>
-          </a:prstGeom>
-          <a:solidFill>
-            <a:srgbClr val="0B2545"/>
-          </a:solidFill>
-          <a:ln>
-            <a:noFill/>
-          </a:ln>
-          <a:effectLst/>
-        </p:spPr>
-        <p:style>
-          <a:lnRef idx="1">
-            <a:schemeClr val="accent1"/>
-          </a:lnRef>
-          <a:fillRef idx="3">
-            <a:schemeClr val="accent1"/>
-          </a:fillRef>
-          <a:effectRef idx="2">
-            <a:schemeClr val="accent1"/>
-          </a:effectRef>
-          <a:fontRef idx="minor">
-            <a:schemeClr val="lt1"/>
-          </a:fontRef>
-        </p:style>
-        <p:txBody>
-          <a:bodyPr rtlCol="0" anchor="ctr"/>
-          <a:lstStyle/>
-          <a:p>
-            <a:pPr algn="ctr"/>
-          </a:p>
-        </p:txBody>
-      </p:sp>
-      <p:sp>
-        <p:nvSpPr>
-          <p:cNvPr id="3" name="TextBox 2"/>
-          <p:cNvSpPr txBox="1"/>
-          <p:nvPr/>
-        </p:nvSpPr>
-        <p:spPr>
-          <a:xfrm>
-            <a:off x="731520" y="502920"/>
-            <a:ext cx="10728655" cy="320040"/>
-          </a:xfrm>
-          <a:prstGeom prst="rect">
-            <a:avLst/>
-          </a:prstGeom>
-          <a:noFill/>
-        </p:spPr>
-        <p:txBody>
-          <a:bodyPr wrap="square">
-            <a:spAutoFit/>
-          </a:bodyPr>
-          <a:lstStyle/>
-          <a:p>
-            <a:pPr algn="l"/>
-            <a:r>
-              <a:rPr sz="1100" b="1">
-                <a:solidFill>
-                  <a:srgbClr val="F2A900"/>
-                </a:solidFill>
-                <a:latin typeface="Segoe UI"/>
-              </a:rPr>
-              <a:t>PART 2</a:t>
-            </a:r>
-          </a:p>
-        </p:txBody>
-      </p:sp>
-      <p:sp>
-        <p:nvSpPr>
-          <p:cNvPr id="4" name="TextBox 3"/>
-          <p:cNvSpPr txBox="1"/>
-          <p:nvPr/>
-        </p:nvSpPr>
-        <p:spPr>
-          <a:xfrm>
-            <a:off x="731520" y="914400"/>
-            <a:ext cx="10728655" cy="914400"/>
-          </a:xfrm>
-          <a:prstGeom prst="rect">
-            <a:avLst/>
-          </a:prstGeom>
-          <a:noFill/>
-        </p:spPr>
-        <p:txBody>
-          <a:bodyPr wrap="square">
-            <a:spAutoFit/>
-          </a:bodyPr>
-          <a:lstStyle/>
-          <a:p>
-            <a:pPr algn="l"/>
-            <a:r>
-              <a:rPr sz="2800" b="1">
-                <a:solidFill>
-                  <a:srgbClr val="FFFFFF"/>
-                </a:solidFill>
-                <a:latin typeface="Segoe UI"/>
-              </a:rPr>
-              <a:t>From radiance to an indicator</a:t>
-            </a:r>
-          </a:p>
-        </p:txBody>
-      </p:sp>
-      <p:sp>
-        <p:nvSpPr>
-          <p:cNvPr id="5" name="TextBox 4"/>
-          <p:cNvSpPr txBox="1"/>
-          <p:nvPr/>
-        </p:nvSpPr>
-        <p:spPr>
-          <a:xfrm>
-            <a:off x="731520" y="1783080"/>
-            <a:ext cx="10728655" cy="548640"/>
-          </a:xfrm>
-          <a:prstGeom prst="rect">
-            <a:avLst/>
-          </a:prstGeom>
-          <a:noFill/>
-        </p:spPr>
-        <p:txBody>
-          <a:bodyPr wrap="square">
-            <a:spAutoFit/>
-          </a:bodyPr>
-          <a:lstStyle/>
-          <a:p>
-            <a:pPr algn="l"/>
-            <a:r>
-              <a:rPr sz="1400" b="0">
-                <a:solidFill>
-                  <a:srgbClr val="DBE7E0"/>
-                </a:solidFill>
-                <a:latin typeface="Segoe UI"/>
-              </a:rPr>
-              <a:t>The five steps you will run this morning and this afternoon.</a:t>
-            </a:r>
-          </a:p>
-        </p:txBody>
-      </p:sp>
-      <p:sp>
-        <p:nvSpPr>
-          <p:cNvPr id="6" name="TextBox 5"/>
-          <p:cNvSpPr txBox="1"/>
-          <p:nvPr/>
-        </p:nvSpPr>
-        <p:spPr>
-          <a:xfrm>
-            <a:off x="731520" y="6400800"/>
-            <a:ext cx="10728655" cy="274320"/>
-          </a:xfrm>
-          <a:prstGeom prst="rect">
-            <a:avLst/>
-          </a:prstGeom>
-          <a:noFill/>
-        </p:spPr>
-        <p:txBody>
-          <a:bodyPr wrap="square">
-            <a:spAutoFit/>
-          </a:bodyPr>
-          <a:lstStyle/>
-          <a:p>
-            <a:pPr algn="l"/>
-            <a:r>
-              <a:rPr sz="900" b="0">
-                <a:solidFill>
-                  <a:srgbClr val="6B7B75"/>
-                </a:solidFill>
-                <a:latin typeface="Segoe UI"/>
-              </a:rPr>
-              <a:t>African Development Bank · AU STATAFRIC · STG17</a:t>
-            </a:r>
-          </a:p>
-        </p:txBody>
-      </p:sp>
-    </p:spTree>
-  </p:cSld>
-  <p:clrMapOvr>
-    <a:masterClrMapping/>
-  </p:clrMapOvr>
-</p:sld>
-</file>
-
-<file path=ppt/slides/slide9.xml><?xml version="1.0" encoding="utf-8"?>
-<p:sld xmlns:a="http://schemas.openxmlformats.org/drawingml/2006/main" xmlns:p="http://schemas.openxmlformats.org/presentationml/2006/main" xmlns:r="http://schemas.openxmlformats.org/officeDocument/2006/relationships">
-  <p:cSld>
-    <p:spTree>
-      <p:nvGrpSpPr>
-        <p:cNvPr id="1" name=""/>
-        <p:cNvGrpSpPr/>
-        <p:nvPr/>
-      </p:nvGrpSpPr>
-      <p:grpSpPr/>
-      <p:sp>
-        <p:nvSpPr>
-          <p:cNvPr id="2" name="Rectangle 1"/>
-          <p:cNvSpPr/>
-          <p:nvPr/>
-        </p:nvSpPr>
-        <p:spPr>
-          <a:xfrm>
-            <a:off x="0" y="0"/>
-            <a:ext cx="12191695" cy="60000"/>
-          </a:xfrm>
-          <a:prstGeom prst="rect">
-            <a:avLst/>
-          </a:prstGeom>
-          <a:solidFill>
-            <a:srgbClr val="F2A900"/>
-          </a:solidFill>
-          <a:ln>
-            <a:noFill/>
-          </a:ln>
-        </p:spPr>
-        <p:style>
-          <a:lnRef idx="1">
-            <a:schemeClr val="accent1"/>
-          </a:lnRef>
-          <a:fillRef idx="3">
-            <a:schemeClr val="accent1"/>
-          </a:fillRef>
-          <a:effectRef idx="2">
-            <a:schemeClr val="accent1"/>
-          </a:effectRef>
-          <a:fontRef idx="minor">
-            <a:schemeClr val="lt1"/>
-          </a:fontRef>
-        </p:style>
-        <p:txBody>
-          <a:bodyPr rtlCol="0" anchor="ctr"/>
-          <a:lstStyle/>
-          <a:p>
-            <a:pPr algn="ctr"/>
-          </a:p>
-        </p:txBody>
-      </p:sp>
-      <p:sp>
-        <p:nvSpPr>
-          <p:cNvPr id="3" name="TextBox 2"/>
-          <p:cNvSpPr txBox="1"/>
-          <p:nvPr/>
-        </p:nvSpPr>
-        <p:spPr>
-          <a:xfrm>
-            <a:off x="731520" y="502920"/>
-            <a:ext cx="10728655" cy="914400"/>
-          </a:xfrm>
-          <a:prstGeom prst="rect">
-            <a:avLst/>
-          </a:prstGeom>
-          <a:noFill/>
-        </p:spPr>
-        <p:txBody>
-          <a:bodyPr wrap="square">
-            <a:spAutoFit/>
-          </a:bodyPr>
-          <a:lstStyle/>
-          <a:p>
-            <a:pPr algn="l"/>
-            <a:r>
-              <a:rPr sz="2800" b="1">
-                <a:solidFill>
-                  <a:srgbClr val="0B2545"/>
-                </a:solidFill>
-                <a:latin typeface="Segoe UI"/>
-              </a:rPr>
-              <a:t>The pipeline, end to end</a:t>
-            </a:r>
-          </a:p>
-        </p:txBody>
-      </p:sp>
-      <p:sp>
-        <p:nvSpPr>
-          <p:cNvPr id="4" name="TextBox 3"/>
-          <p:cNvSpPr txBox="1"/>
-          <p:nvPr/>
-        </p:nvSpPr>
-        <p:spPr>
-          <a:xfrm>
-            <a:off x="731520" y="1371600"/>
-            <a:ext cx="10728655" cy="640080"/>
-          </a:xfrm>
-          <a:prstGeom prst="rect">
-            <a:avLst/>
-          </a:prstGeom>
-          <a:noFill/>
-        </p:spPr>
-        <p:txBody>
-          <a:bodyPr wrap="square">
-            <a:spAutoFit/>
-          </a:bodyPr>
-          <a:lstStyle/>
-          <a:p>
-            <a:pPr algn="l"/>
-            <a:r>
-              <a:rPr sz="1100" b="0">
-                <a:solidFill>
-                  <a:srgbClr val="6B7B75"/>
-                </a:solidFill>
-                <a:latin typeface="Segoe UI"/>
-              </a:rPr>
-              <a:t>FIGURE — screenshot slide 9 of the HTML deck and paste it here.  (Step 5 is not a formality. It is the step that decides whether your country can disseminate this.)</a:t>
-            </a:r>
-          </a:p>
-        </p:txBody>
-      </p:sp>
       <p:sp>
         <p:nvSpPr>
           <p:cNvPr id="5" name="TextBox 4"/>

--- a/docs/slides/pptx/08-ntl-what-darkness-tells-us-en.pptx
+++ b/docs/slides/pptx/08-ntl-what-darkness-tells-us-en.pptx
@@ -3759,119 +3759,13 @@
       </p:sp>
       <p:sp>
         <p:nvSpPr>
-          <p:cNvPr id="4" name="TextBox 3"/>
-          <p:cNvSpPr txBox="1"/>
+          <p:cNvPr id="4" name="Rectangle 3"/>
+          <p:cNvSpPr/>
           <p:nvPr/>
         </p:nvSpPr>
         <p:spPr>
           <a:xfrm>
             <a:off x="731520" y="1371600"/>
-            <a:ext cx="10728655" cy="548640"/>
-          </a:xfrm>
-          <a:prstGeom prst="rect">
-            <a:avLst/>
-          </a:prstGeom>
-          <a:noFill/>
-        </p:spPr>
-        <p:txBody>
-          <a:bodyPr wrap="square">
-            <a:spAutoFit/>
-          </a:bodyPr>
-          <a:lstStyle/>
-          <a:p>
-            <a:pPr algn="l"/>
-            <a:r>
-              <a:rPr sz="1400" b="0">
-                <a:solidFill>
-                  <a:srgbClr val="33403A"/>
-                </a:solidFill>
-                <a:latin typeface="Segoe UI"/>
-              </a:rPr>
-              <a:t>Total radiance over an area.</a:t>
-            </a:r>
-          </a:p>
-        </p:txBody>
-      </p:sp>
-      <p:sp>
-        <p:nvSpPr>
-          <p:cNvPr id="5" name="TextBox 4"/>
-          <p:cNvSpPr txBox="1"/>
-          <p:nvPr/>
-        </p:nvSpPr>
-        <p:spPr>
-          <a:xfrm>
-            <a:off x="731520" y="1874520"/>
-            <a:ext cx="10728655" cy="548640"/>
-          </a:xfrm>
-          <a:prstGeom prst="rect">
-            <a:avLst/>
-          </a:prstGeom>
-          <a:noFill/>
-        </p:spPr>
-        <p:txBody>
-          <a:bodyPr wrap="square">
-            <a:spAutoFit/>
-          </a:bodyPr>
-          <a:lstStyle/>
-          <a:p>
-            <a:pPr algn="l"/>
-            <a:r>
-              <a:rPr sz="1400" b="0">
-                <a:solidFill>
-                  <a:srgbClr val="33403A"/>
-                </a:solidFill>
-                <a:latin typeface="Segoe UI"/>
-              </a:rPr>
-              <a:t>How much lit activity? 
-Dominated by cities.</a:t>
-            </a:r>
-          </a:p>
-        </p:txBody>
-      </p:sp>
-      <p:sp>
-        <p:nvSpPr>
-          <p:cNvPr id="6" name="TextBox 5"/>
-          <p:cNvSpPr txBox="1"/>
-          <p:nvPr/>
-        </p:nvSpPr>
-        <p:spPr>
-          <a:xfrm>
-            <a:off x="731520" y="2377440"/>
-            <a:ext cx="10728655" cy="548640"/>
-          </a:xfrm>
-          <a:prstGeom prst="rect">
-            <a:avLst/>
-          </a:prstGeom>
-          <a:noFill/>
-        </p:spPr>
-        <p:txBody>
-          <a:bodyPr wrap="square">
-            <a:spAutoFit/>
-          </a:bodyPr>
-          <a:lstStyle/>
-          <a:p>
-            <a:pPr algn="l"/>
-            <a:r>
-              <a:rPr sz="1400" b="0">
-                <a:solidFill>
-                  <a:srgbClr val="33403A"/>
-                </a:solidFill>
-                <a:latin typeface="Segoe UI"/>
-              </a:rPr>
-              <a:t>Share of territory above a threshold.</a:t>
-            </a:r>
-          </a:p>
-        </p:txBody>
-      </p:sp>
-      <p:sp>
-        <p:nvSpPr>
-          <p:cNvPr id="7" name="Rectangle 6"/>
-          <p:cNvSpPr/>
-          <p:nvPr/>
-        </p:nvSpPr>
-        <p:spPr>
-          <a:xfrm>
-            <a:off x="731520" y="2880360"/>
             <a:ext cx="10728655" cy="960120"/>
           </a:xfrm>
           <a:prstGeom prst="rect">
@@ -3921,7 +3815,7 @@
       </p:sp>
       <p:sp>
         <p:nvSpPr>
-          <p:cNvPr id="8" name="TextBox 7"/>
+          <p:cNvPr id="5" name="TextBox 4"/>
           <p:cNvSpPr txBox="1"/>
           <p:nvPr/>
         </p:nvSpPr>
@@ -5169,7 +5063,7 @@
                 </a:solidFill>
                 <a:latin typeface="Segoe UI"/>
               </a:rPr>
-              <a:t>•  Electrification progress</a:t>
+              <a:t>•  GDP in levels</a:t>
             </a:r>
           </a:p>
           <a:p>
@@ -5185,7 +5079,7 @@
                 </a:solidFill>
                 <a:latin typeface="Segoe UI"/>
               </a:rPr>
-              <a:t>•  Urbanisation and settlement growth</a:t>
+              <a:t>•  Household connection rates</a:t>
             </a:r>
           </a:p>
           <a:p>
@@ -5201,7 +5095,7 @@
                 </a:solidFill>
                 <a:latin typeface="Segoe UI"/>
               </a:rPr>
-              <a:t>•  Crisis and conflict impact</a:t>
+              <a:t>•  Daytime informal activity</a:t>
             </a:r>
           </a:p>
           <a:p>
@@ -5217,7 +5111,7 @@
                 </a:solidFill>
                 <a:latin typeface="Segoe UI"/>
               </a:rPr>
-              <a:t>•  Spatial inequality of infrastructure</a:t>
+              <a:t>•  Anything at village scale</a:t>
             </a:r>
           </a:p>
           <a:p>
@@ -5233,7 +5127,7 @@
                 </a:solidFill>
                 <a:latin typeface="Segoe UI"/>
               </a:rPr>
-              <a:t>•  District comparison  within one year</a:t>
+              <a:t>•  Cross-country levels</a:t>
             </a:r>
           </a:p>
           <a:p>
@@ -5249,7 +5143,7 @@
                 </a:solidFill>
                 <a:latin typeface="Segoe UI"/>
               </a:rPr>
-              <a:t>•  GDP in levels</a:t>
+              <a:t>•  Electrification progress</a:t>
             </a:r>
           </a:p>
           <a:p>
@@ -5265,7 +5159,7 @@
                 </a:solidFill>
                 <a:latin typeface="Segoe UI"/>
               </a:rPr>
-              <a:t>•  Household connection rates</a:t>
+              <a:t>•  Urbanisation and settlement growth</a:t>
             </a:r>
           </a:p>
           <a:p>
@@ -5281,7 +5175,7 @@
                 </a:solidFill>
                 <a:latin typeface="Segoe UI"/>
               </a:rPr>
-              <a:t>•  Daytime informal activity</a:t>
+              <a:t>•  Crisis and conflict impact</a:t>
             </a:r>
           </a:p>
           <a:p>
@@ -5297,7 +5191,7 @@
                 </a:solidFill>
                 <a:latin typeface="Segoe UI"/>
               </a:rPr>
-              <a:t>•  Anything at village scale</a:t>
+              <a:t>•  Spatial inequality of infrastructure</a:t>
             </a:r>
           </a:p>
         </p:txBody>
